--- a/img/bg.pptx
+++ b/img/bg.pptx
@@ -13,6 +13,9 @@
     <p:sldId id="263" r:id="rId7"/>
     <p:sldId id="261" r:id="rId8"/>
     <p:sldId id="262" r:id="rId9"/>
+    <p:sldId id="264" r:id="rId10"/>
+    <p:sldId id="266" r:id="rId11"/>
+    <p:sldId id="265" r:id="rId12"/>
   </p:sldIdLst>
   <p:sldSz cx="12192000" cy="6858000"/>
   <p:notesSz cx="6858000" cy="9144000"/>
@@ -1933,6 +1936,388 @@
       </pc:sldChg>
     </pc:docChg>
   </pc:docChgLst>
+  <pc:docChgLst>
+    <pc:chgData name="Gabriel Andrade" userId="0df7df97-c402-4ba0-be1b-4ff7c207c9e2" providerId="ADAL" clId="{D50AC27B-CB31-4AB4-88FF-8E0E079A14E2}"/>
+    <pc:docChg chg="custSel addSld modSld">
+      <pc:chgData name="Gabriel Andrade" userId="0df7df97-c402-4ba0-be1b-4ff7c207c9e2" providerId="ADAL" clId="{D50AC27B-CB31-4AB4-88FF-8E0E079A14E2}" dt="2026-10-28T16:10:07.483" v="144" actId="1076"/>
+      <pc:docMkLst>
+        <pc:docMk/>
+      </pc:docMkLst>
+      <pc:sldChg chg="addSp delSp modSp new mod">
+        <pc:chgData name="Gabriel Andrade" userId="0df7df97-c402-4ba0-be1b-4ff7c207c9e2" providerId="ADAL" clId="{D50AC27B-CB31-4AB4-88FF-8E0E079A14E2}" dt="2026-10-28T15:42:53.552" v="77" actId="1076"/>
+        <pc:sldMkLst>
+          <pc:docMk/>
+          <pc:sldMk cId="1360744752" sldId="264"/>
+        </pc:sldMkLst>
+        <pc:spChg chg="del">
+          <ac:chgData name="Gabriel Andrade" userId="0df7df97-c402-4ba0-be1b-4ff7c207c9e2" providerId="ADAL" clId="{D50AC27B-CB31-4AB4-88FF-8E0E079A14E2}" dt="2026-10-28T15:37:57.054" v="1" actId="478"/>
+          <ac:spMkLst>
+            <pc:docMk/>
+            <pc:sldMk cId="1360744752" sldId="264"/>
+            <ac:spMk id="2" creationId="{76901599-D5F6-B797-E741-28B791415E23}"/>
+          </ac:spMkLst>
+        </pc:spChg>
+        <pc:spChg chg="del">
+          <ac:chgData name="Gabriel Andrade" userId="0df7df97-c402-4ba0-be1b-4ff7c207c9e2" providerId="ADAL" clId="{D50AC27B-CB31-4AB4-88FF-8E0E079A14E2}" dt="2026-10-28T15:37:59.494" v="2" actId="478"/>
+          <ac:spMkLst>
+            <pc:docMk/>
+            <pc:sldMk cId="1360744752" sldId="264"/>
+            <ac:spMk id="3" creationId="{32EA614E-10D2-C4F1-60EA-1E2C42F01C44}"/>
+          </ac:spMkLst>
+        </pc:spChg>
+        <pc:spChg chg="add mod">
+          <ac:chgData name="Gabriel Andrade" userId="0df7df97-c402-4ba0-be1b-4ff7c207c9e2" providerId="ADAL" clId="{D50AC27B-CB31-4AB4-88FF-8E0E079A14E2}" dt="2026-10-28T15:40:54.349" v="31" actId="1076"/>
+          <ac:spMkLst>
+            <pc:docMk/>
+            <pc:sldMk cId="1360744752" sldId="264"/>
+            <ac:spMk id="6" creationId="{C9B4CC99-B754-75DD-6BE3-B5F6F9CCB7D8}"/>
+          </ac:spMkLst>
+        </pc:spChg>
+        <pc:spChg chg="add mod">
+          <ac:chgData name="Gabriel Andrade" userId="0df7df97-c402-4ba0-be1b-4ff7c207c9e2" providerId="ADAL" clId="{D50AC27B-CB31-4AB4-88FF-8E0E079A14E2}" dt="2026-10-28T15:42:04.896" v="49" actId="1076"/>
+          <ac:spMkLst>
+            <pc:docMk/>
+            <pc:sldMk cId="1360744752" sldId="264"/>
+            <ac:spMk id="20" creationId="{71144CC6-7549-C997-C121-43FB559FF30B}"/>
+          </ac:spMkLst>
+        </pc:spChg>
+        <pc:spChg chg="add mod">
+          <ac:chgData name="Gabriel Andrade" userId="0df7df97-c402-4ba0-be1b-4ff7c207c9e2" providerId="ADAL" clId="{D50AC27B-CB31-4AB4-88FF-8E0E079A14E2}" dt="2026-10-28T15:42:10.775" v="53" actId="1076"/>
+          <ac:spMkLst>
+            <pc:docMk/>
+            <pc:sldMk cId="1360744752" sldId="264"/>
+            <ac:spMk id="21" creationId="{485B359A-F4FB-E700-7565-C8AA4510D94B}"/>
+          </ac:spMkLst>
+        </pc:spChg>
+        <pc:spChg chg="add mod">
+          <ac:chgData name="Gabriel Andrade" userId="0df7df97-c402-4ba0-be1b-4ff7c207c9e2" providerId="ADAL" clId="{D50AC27B-CB31-4AB4-88FF-8E0E079A14E2}" dt="2026-10-28T15:42:20.237" v="58" actId="1076"/>
+          <ac:spMkLst>
+            <pc:docMk/>
+            <pc:sldMk cId="1360744752" sldId="264"/>
+            <ac:spMk id="22" creationId="{3D59F04E-7782-3C36-BDAB-764FC3D5362D}"/>
+          </ac:spMkLst>
+        </pc:spChg>
+        <pc:spChg chg="add mod">
+          <ac:chgData name="Gabriel Andrade" userId="0df7df97-c402-4ba0-be1b-4ff7c207c9e2" providerId="ADAL" clId="{D50AC27B-CB31-4AB4-88FF-8E0E079A14E2}" dt="2026-10-28T15:42:36.944" v="67" actId="1076"/>
+          <ac:spMkLst>
+            <pc:docMk/>
+            <pc:sldMk cId="1360744752" sldId="264"/>
+            <ac:spMk id="23" creationId="{35BA1CCE-ADCA-C13A-F5B3-8C6674CDB1FB}"/>
+          </ac:spMkLst>
+        </pc:spChg>
+        <pc:spChg chg="add mod">
+          <ac:chgData name="Gabriel Andrade" userId="0df7df97-c402-4ba0-be1b-4ff7c207c9e2" providerId="ADAL" clId="{D50AC27B-CB31-4AB4-88FF-8E0E079A14E2}" dt="2026-10-28T15:42:51.973" v="76" actId="1076"/>
+          <ac:spMkLst>
+            <pc:docMk/>
+            <pc:sldMk cId="1360744752" sldId="264"/>
+            <ac:spMk id="24" creationId="{528F6F00-5836-9204-85F4-F99EA9EBACC9}"/>
+          </ac:spMkLst>
+        </pc:spChg>
+        <pc:grpChg chg="add mod">
+          <ac:chgData name="Gabriel Andrade" userId="0df7df97-c402-4ba0-be1b-4ff7c207c9e2" providerId="ADAL" clId="{D50AC27B-CB31-4AB4-88FF-8E0E079A14E2}" dt="2026-10-28T15:40:54.349" v="31" actId="1076"/>
+          <ac:grpSpMkLst>
+            <pc:docMk/>
+            <pc:sldMk cId="1360744752" sldId="264"/>
+            <ac:grpSpMk id="19" creationId="{0390CAAF-EA64-1F12-27FD-ED798CE10BB0}"/>
+          </ac:grpSpMkLst>
+        </pc:grpChg>
+        <pc:picChg chg="add mod">
+          <ac:chgData name="Gabriel Andrade" userId="0df7df97-c402-4ba0-be1b-4ff7c207c9e2" providerId="ADAL" clId="{D50AC27B-CB31-4AB4-88FF-8E0E079A14E2}" dt="2026-10-28T15:40:34.743" v="25" actId="1076"/>
+          <ac:picMkLst>
+            <pc:docMk/>
+            <pc:sldMk cId="1360744752" sldId="264"/>
+            <ac:picMk id="4" creationId="{2F4D65F9-AEAD-741E-E39C-BC0D51D7E2C3}"/>
+          </ac:picMkLst>
+        </pc:picChg>
+        <pc:picChg chg="add mod">
+          <ac:chgData name="Gabriel Andrade" userId="0df7df97-c402-4ba0-be1b-4ff7c207c9e2" providerId="ADAL" clId="{D50AC27B-CB31-4AB4-88FF-8E0E079A14E2}" dt="2026-10-28T15:40:54.349" v="31" actId="1076"/>
+          <ac:picMkLst>
+            <pc:docMk/>
+            <pc:sldMk cId="1360744752" sldId="264"/>
+            <ac:picMk id="5" creationId="{3803B8FB-8899-EEE6-FD65-A51F93ADCF5A}"/>
+          </ac:picMkLst>
+        </pc:picChg>
+        <pc:picChg chg="add mod">
+          <ac:chgData name="Gabriel Andrade" userId="0df7df97-c402-4ba0-be1b-4ff7c207c9e2" providerId="ADAL" clId="{D50AC27B-CB31-4AB4-88FF-8E0E079A14E2}" dt="2026-10-28T15:40:54.349" v="31" actId="1076"/>
+          <ac:picMkLst>
+            <pc:docMk/>
+            <pc:sldMk cId="1360744752" sldId="264"/>
+            <ac:picMk id="7" creationId="{528DEAE8-2A31-7477-545A-A36FC1D655B9}"/>
+          </ac:picMkLst>
+        </pc:picChg>
+        <pc:picChg chg="add mod">
+          <ac:chgData name="Gabriel Andrade" userId="0df7df97-c402-4ba0-be1b-4ff7c207c9e2" providerId="ADAL" clId="{D50AC27B-CB31-4AB4-88FF-8E0E079A14E2}" dt="2026-10-28T15:40:54.349" v="31" actId="1076"/>
+          <ac:picMkLst>
+            <pc:docMk/>
+            <pc:sldMk cId="1360744752" sldId="264"/>
+            <ac:picMk id="8" creationId="{066F0000-2205-505F-76FF-64EF1468DC43}"/>
+          </ac:picMkLst>
+        </pc:picChg>
+        <pc:picChg chg="add mod">
+          <ac:chgData name="Gabriel Andrade" userId="0df7df97-c402-4ba0-be1b-4ff7c207c9e2" providerId="ADAL" clId="{D50AC27B-CB31-4AB4-88FF-8E0E079A14E2}" dt="2026-10-28T15:40:54.349" v="31" actId="1076"/>
+          <ac:picMkLst>
+            <pc:docMk/>
+            <pc:sldMk cId="1360744752" sldId="264"/>
+            <ac:picMk id="9" creationId="{47E32DE3-0768-589E-53F9-5F2ABDF40BD6}"/>
+          </ac:picMkLst>
+        </pc:picChg>
+        <pc:picChg chg="add mod">
+          <ac:chgData name="Gabriel Andrade" userId="0df7df97-c402-4ba0-be1b-4ff7c207c9e2" providerId="ADAL" clId="{D50AC27B-CB31-4AB4-88FF-8E0E079A14E2}" dt="2026-10-28T15:40:54.349" v="31" actId="1076"/>
+          <ac:picMkLst>
+            <pc:docMk/>
+            <pc:sldMk cId="1360744752" sldId="264"/>
+            <ac:picMk id="10" creationId="{53BEFEEB-088B-9C4C-A16E-C756AB76B249}"/>
+          </ac:picMkLst>
+        </pc:picChg>
+        <pc:picChg chg="add mod">
+          <ac:chgData name="Gabriel Andrade" userId="0df7df97-c402-4ba0-be1b-4ff7c207c9e2" providerId="ADAL" clId="{D50AC27B-CB31-4AB4-88FF-8E0E079A14E2}" dt="2026-10-28T15:40:54.349" v="31" actId="1076"/>
+          <ac:picMkLst>
+            <pc:docMk/>
+            <pc:sldMk cId="1360744752" sldId="264"/>
+            <ac:picMk id="11" creationId="{A6BF2605-74A9-D9AC-B72E-6254D2960E8E}"/>
+          </ac:picMkLst>
+        </pc:picChg>
+        <pc:picChg chg="add mod">
+          <ac:chgData name="Gabriel Andrade" userId="0df7df97-c402-4ba0-be1b-4ff7c207c9e2" providerId="ADAL" clId="{D50AC27B-CB31-4AB4-88FF-8E0E079A14E2}" dt="2026-10-28T15:40:54.349" v="31" actId="1076"/>
+          <ac:picMkLst>
+            <pc:docMk/>
+            <pc:sldMk cId="1360744752" sldId="264"/>
+            <ac:picMk id="12" creationId="{4CC7A48C-87C6-E7DE-DB58-A8CEDBFC003B}"/>
+          </ac:picMkLst>
+        </pc:picChg>
+        <pc:picChg chg="add mod">
+          <ac:chgData name="Gabriel Andrade" userId="0df7df97-c402-4ba0-be1b-4ff7c207c9e2" providerId="ADAL" clId="{D50AC27B-CB31-4AB4-88FF-8E0E079A14E2}" dt="2026-10-28T15:40:54.349" v="31" actId="1076"/>
+          <ac:picMkLst>
+            <pc:docMk/>
+            <pc:sldMk cId="1360744752" sldId="264"/>
+            <ac:picMk id="13" creationId="{71C27DF5-78C8-6FDB-5D69-0D8A36B36723}"/>
+          </ac:picMkLst>
+        </pc:picChg>
+        <pc:picChg chg="add mod">
+          <ac:chgData name="Gabriel Andrade" userId="0df7df97-c402-4ba0-be1b-4ff7c207c9e2" providerId="ADAL" clId="{D50AC27B-CB31-4AB4-88FF-8E0E079A14E2}" dt="2026-10-28T15:40:54.349" v="31" actId="1076"/>
+          <ac:picMkLst>
+            <pc:docMk/>
+            <pc:sldMk cId="1360744752" sldId="264"/>
+            <ac:picMk id="14" creationId="{F02739D7-4EB4-5417-2443-C7F315A42B1A}"/>
+          </ac:picMkLst>
+        </pc:picChg>
+        <pc:picChg chg="add mod">
+          <ac:chgData name="Gabriel Andrade" userId="0df7df97-c402-4ba0-be1b-4ff7c207c9e2" providerId="ADAL" clId="{D50AC27B-CB31-4AB4-88FF-8E0E079A14E2}" dt="2026-10-28T15:40:54.349" v="31" actId="1076"/>
+          <ac:picMkLst>
+            <pc:docMk/>
+            <pc:sldMk cId="1360744752" sldId="264"/>
+            <ac:picMk id="15" creationId="{1F6EAF15-8A31-AF5C-7209-89500CD53F60}"/>
+          </ac:picMkLst>
+        </pc:picChg>
+        <pc:picChg chg="add mod">
+          <ac:chgData name="Gabriel Andrade" userId="0df7df97-c402-4ba0-be1b-4ff7c207c9e2" providerId="ADAL" clId="{D50AC27B-CB31-4AB4-88FF-8E0E079A14E2}" dt="2026-10-28T15:40:54.349" v="31" actId="1076"/>
+          <ac:picMkLst>
+            <pc:docMk/>
+            <pc:sldMk cId="1360744752" sldId="264"/>
+            <ac:picMk id="16" creationId="{D16B262A-72E8-2C37-3860-243D077AFAC7}"/>
+          </ac:picMkLst>
+        </pc:picChg>
+        <pc:picChg chg="add mod">
+          <ac:chgData name="Gabriel Andrade" userId="0df7df97-c402-4ba0-be1b-4ff7c207c9e2" providerId="ADAL" clId="{D50AC27B-CB31-4AB4-88FF-8E0E079A14E2}" dt="2026-10-28T15:40:54.349" v="31" actId="1076"/>
+          <ac:picMkLst>
+            <pc:docMk/>
+            <pc:sldMk cId="1360744752" sldId="264"/>
+            <ac:picMk id="17" creationId="{644BEF28-54F5-55EC-2476-C3F1A057A320}"/>
+          </ac:picMkLst>
+        </pc:picChg>
+        <pc:picChg chg="add mod">
+          <ac:chgData name="Gabriel Andrade" userId="0df7df97-c402-4ba0-be1b-4ff7c207c9e2" providerId="ADAL" clId="{D50AC27B-CB31-4AB4-88FF-8E0E079A14E2}" dt="2026-10-28T15:41:01.606" v="36" actId="1076"/>
+          <ac:picMkLst>
+            <pc:docMk/>
+            <pc:sldMk cId="1360744752" sldId="264"/>
+            <ac:picMk id="18" creationId="{10633EBF-5A3C-9972-8B9D-3D647842A74D}"/>
+          </ac:picMkLst>
+        </pc:picChg>
+        <pc:picChg chg="add mod">
+          <ac:chgData name="Gabriel Andrade" userId="0df7df97-c402-4ba0-be1b-4ff7c207c9e2" providerId="ADAL" clId="{D50AC27B-CB31-4AB4-88FF-8E0E079A14E2}" dt="2026-10-28T15:42:53.552" v="77" actId="1076"/>
+          <ac:picMkLst>
+            <pc:docMk/>
+            <pc:sldMk cId="1360744752" sldId="264"/>
+            <ac:picMk id="1026" creationId="{9479AA01-CDD8-B297-E556-C7098DA30CBF}"/>
+          </ac:picMkLst>
+        </pc:picChg>
+        <pc:picChg chg="add mod">
+          <ac:chgData name="Gabriel Andrade" userId="0df7df97-c402-4ba0-be1b-4ff7c207c9e2" providerId="ADAL" clId="{D50AC27B-CB31-4AB4-88FF-8E0E079A14E2}" dt="2026-10-28T15:42:14.826" v="56" actId="1076"/>
+          <ac:picMkLst>
+            <pc:docMk/>
+            <pc:sldMk cId="1360744752" sldId="264"/>
+            <ac:picMk id="1028" creationId="{0823C0B7-EDD6-49B8-244B-63037A1A6CD3}"/>
+          </ac:picMkLst>
+        </pc:picChg>
+        <pc:picChg chg="add mod">
+          <ac:chgData name="Gabriel Andrade" userId="0df7df97-c402-4ba0-be1b-4ff7c207c9e2" providerId="ADAL" clId="{D50AC27B-CB31-4AB4-88FF-8E0E079A14E2}" dt="2026-10-28T15:42:35.131" v="66" actId="1076"/>
+          <ac:picMkLst>
+            <pc:docMk/>
+            <pc:sldMk cId="1360744752" sldId="264"/>
+            <ac:picMk id="1030" creationId="{E2B7548B-D304-75C4-744F-1309C596472E}"/>
+          </ac:picMkLst>
+        </pc:picChg>
+      </pc:sldChg>
+      <pc:sldChg chg="addSp delSp modSp new mod">
+        <pc:chgData name="Gabriel Andrade" userId="0df7df97-c402-4ba0-be1b-4ff7c207c9e2" providerId="ADAL" clId="{D50AC27B-CB31-4AB4-88FF-8E0E079A14E2}" dt="2026-10-28T15:55:15.272" v="94" actId="14100"/>
+        <pc:sldMkLst>
+          <pc:docMk/>
+          <pc:sldMk cId="1195098065" sldId="265"/>
+        </pc:sldMkLst>
+        <pc:spChg chg="del">
+          <ac:chgData name="Gabriel Andrade" userId="0df7df97-c402-4ba0-be1b-4ff7c207c9e2" providerId="ADAL" clId="{D50AC27B-CB31-4AB4-88FF-8E0E079A14E2}" dt="2026-10-28T15:54:09.905" v="79" actId="478"/>
+          <ac:spMkLst>
+            <pc:docMk/>
+            <pc:sldMk cId="1195098065" sldId="265"/>
+            <ac:spMk id="2" creationId="{D91A62A3-6C8C-1A44-482D-06A3E8A493FC}"/>
+          </ac:spMkLst>
+        </pc:spChg>
+        <pc:spChg chg="del">
+          <ac:chgData name="Gabriel Andrade" userId="0df7df97-c402-4ba0-be1b-4ff7c207c9e2" providerId="ADAL" clId="{D50AC27B-CB31-4AB4-88FF-8E0E079A14E2}" dt="2026-10-28T15:54:11.680" v="80" actId="478"/>
+          <ac:spMkLst>
+            <pc:docMk/>
+            <pc:sldMk cId="1195098065" sldId="265"/>
+            <ac:spMk id="3" creationId="{32EEC4EC-833E-C521-43DD-53DCD20CC373}"/>
+          </ac:spMkLst>
+        </pc:spChg>
+        <pc:picChg chg="add mod modCrop">
+          <ac:chgData name="Gabriel Andrade" userId="0df7df97-c402-4ba0-be1b-4ff7c207c9e2" providerId="ADAL" clId="{D50AC27B-CB31-4AB4-88FF-8E0E079A14E2}" dt="2026-10-28T15:55:04.378" v="93" actId="732"/>
+          <ac:picMkLst>
+            <pc:docMk/>
+            <pc:sldMk cId="1195098065" sldId="265"/>
+            <ac:picMk id="5" creationId="{759EE8AD-6B93-A50F-FBB0-D7115FDAA304}"/>
+          </ac:picMkLst>
+        </pc:picChg>
+        <pc:picChg chg="add mod modCrop">
+          <ac:chgData name="Gabriel Andrade" userId="0df7df97-c402-4ba0-be1b-4ff7c207c9e2" providerId="ADAL" clId="{D50AC27B-CB31-4AB4-88FF-8E0E079A14E2}" dt="2026-10-28T15:55:15.272" v="94" actId="14100"/>
+          <ac:picMkLst>
+            <pc:docMk/>
+            <pc:sldMk cId="1195098065" sldId="265"/>
+            <ac:picMk id="7" creationId="{A8BD7F0D-BCEB-2FFF-BF79-0FEE57C0FC4C}"/>
+          </ac:picMkLst>
+        </pc:picChg>
+      </pc:sldChg>
+      <pc:sldChg chg="addSp delSp modSp add mod">
+        <pc:chgData name="Gabriel Andrade" userId="0df7df97-c402-4ba0-be1b-4ff7c207c9e2" providerId="ADAL" clId="{D50AC27B-CB31-4AB4-88FF-8E0E079A14E2}" dt="2026-10-28T16:10:07.483" v="144" actId="1076"/>
+        <pc:sldMkLst>
+          <pc:docMk/>
+          <pc:sldMk cId="1624425404" sldId="266"/>
+        </pc:sldMkLst>
+        <pc:spChg chg="add mod">
+          <ac:chgData name="Gabriel Andrade" userId="0df7df97-c402-4ba0-be1b-4ff7c207c9e2" providerId="ADAL" clId="{D50AC27B-CB31-4AB4-88FF-8E0E079A14E2}" dt="2026-10-28T16:09:25.938" v="136" actId="688"/>
+          <ac:spMkLst>
+            <pc:docMk/>
+            <pc:sldMk cId="1624425404" sldId="266"/>
+            <ac:spMk id="2" creationId="{7E203289-6D1A-006D-BBC0-0663AC560F27}"/>
+          </ac:spMkLst>
+        </pc:spChg>
+        <pc:spChg chg="add mod">
+          <ac:chgData name="Gabriel Andrade" userId="0df7df97-c402-4ba0-be1b-4ff7c207c9e2" providerId="ADAL" clId="{D50AC27B-CB31-4AB4-88FF-8E0E079A14E2}" dt="2026-10-28T16:09:32.518" v="139" actId="1076"/>
+          <ac:spMkLst>
+            <pc:docMk/>
+            <pc:sldMk cId="1624425404" sldId="266"/>
+            <ac:spMk id="3" creationId="{674C8C01-21ED-9CAC-A452-3CF4E6AF7B2D}"/>
+          </ac:spMkLst>
+        </pc:spChg>
+        <pc:spChg chg="del">
+          <ac:chgData name="Gabriel Andrade" userId="0df7df97-c402-4ba0-be1b-4ff7c207c9e2" providerId="ADAL" clId="{D50AC27B-CB31-4AB4-88FF-8E0E079A14E2}" dt="2026-10-28T16:00:41.211" v="96" actId="478"/>
+          <ac:spMkLst>
+            <pc:docMk/>
+            <pc:sldMk cId="1624425404" sldId="266"/>
+            <ac:spMk id="20" creationId="{71144CC6-7549-C997-C121-43FB559FF30B}"/>
+          </ac:spMkLst>
+        </pc:spChg>
+        <pc:spChg chg="del mod">
+          <ac:chgData name="Gabriel Andrade" userId="0df7df97-c402-4ba0-be1b-4ff7c207c9e2" providerId="ADAL" clId="{D50AC27B-CB31-4AB4-88FF-8E0E079A14E2}" dt="2026-10-28T16:03:00.694" v="112" actId="478"/>
+          <ac:spMkLst>
+            <pc:docMk/>
+            <pc:sldMk cId="1624425404" sldId="266"/>
+            <ac:spMk id="21" creationId="{485B359A-F4FB-E700-7565-C8AA4510D94B}"/>
+          </ac:spMkLst>
+        </pc:spChg>
+        <pc:spChg chg="del">
+          <ac:chgData name="Gabriel Andrade" userId="0df7df97-c402-4ba0-be1b-4ff7c207c9e2" providerId="ADAL" clId="{D50AC27B-CB31-4AB4-88FF-8E0E079A14E2}" dt="2026-10-28T16:00:47.275" v="98" actId="478"/>
+          <ac:spMkLst>
+            <pc:docMk/>
+            <pc:sldMk cId="1624425404" sldId="266"/>
+            <ac:spMk id="22" creationId="{3D59F04E-7782-3C36-BDAB-764FC3D5362D}"/>
+          </ac:spMkLst>
+        </pc:spChg>
+        <pc:spChg chg="del mod">
+          <ac:chgData name="Gabriel Andrade" userId="0df7df97-c402-4ba0-be1b-4ff7c207c9e2" providerId="ADAL" clId="{D50AC27B-CB31-4AB4-88FF-8E0E079A14E2}" dt="2026-10-28T16:01:27.871" v="111" actId="478"/>
+          <ac:spMkLst>
+            <pc:docMk/>
+            <pc:sldMk cId="1624425404" sldId="266"/>
+            <ac:spMk id="23" creationId="{35BA1CCE-ADCA-C13A-F5B3-8C6674CDB1FB}"/>
+          </ac:spMkLst>
+        </pc:spChg>
+        <pc:spChg chg="del">
+          <ac:chgData name="Gabriel Andrade" userId="0df7df97-c402-4ba0-be1b-4ff7c207c9e2" providerId="ADAL" clId="{D50AC27B-CB31-4AB4-88FF-8E0E079A14E2}" dt="2026-10-28T16:00:53.502" v="100" actId="478"/>
+          <ac:spMkLst>
+            <pc:docMk/>
+            <pc:sldMk cId="1624425404" sldId="266"/>
+            <ac:spMk id="24" creationId="{528F6F00-5836-9204-85F4-F99EA9EBACC9}"/>
+          </ac:spMkLst>
+        </pc:spChg>
+        <pc:spChg chg="add mod">
+          <ac:chgData name="Gabriel Andrade" userId="0df7df97-c402-4ba0-be1b-4ff7c207c9e2" providerId="ADAL" clId="{D50AC27B-CB31-4AB4-88FF-8E0E079A14E2}" dt="2026-10-28T16:10:07.483" v="144" actId="1076"/>
+          <ac:spMkLst>
+            <pc:docMk/>
+            <pc:sldMk cId="1624425404" sldId="266"/>
+            <ac:spMk id="26" creationId="{A3F3C180-BE74-950E-8516-C839142F15E9}"/>
+          </ac:spMkLst>
+        </pc:spChg>
+        <pc:grpChg chg="del">
+          <ac:chgData name="Gabriel Andrade" userId="0df7df97-c402-4ba0-be1b-4ff7c207c9e2" providerId="ADAL" clId="{D50AC27B-CB31-4AB4-88FF-8E0E079A14E2}" dt="2026-10-28T16:00:41.211" v="96" actId="478"/>
+          <ac:grpSpMkLst>
+            <pc:docMk/>
+            <pc:sldMk cId="1624425404" sldId="266"/>
+            <ac:grpSpMk id="19" creationId="{0390CAAF-EA64-1F12-27FD-ED798CE10BB0}"/>
+          </ac:grpSpMkLst>
+        </pc:grpChg>
+        <pc:picChg chg="mod">
+          <ac:chgData name="Gabriel Andrade" userId="0df7df97-c402-4ba0-be1b-4ff7c207c9e2" providerId="ADAL" clId="{D50AC27B-CB31-4AB4-88FF-8E0E079A14E2}" dt="2026-10-28T16:03:17.297" v="118" actId="14100"/>
+          <ac:picMkLst>
+            <pc:docMk/>
+            <pc:sldMk cId="1624425404" sldId="266"/>
+            <ac:picMk id="4" creationId="{2F4D65F9-AEAD-741E-E39C-BC0D51D7E2C3}"/>
+          </ac:picMkLst>
+        </pc:picChg>
+        <pc:picChg chg="mod">
+          <ac:chgData name="Gabriel Andrade" userId="0df7df97-c402-4ba0-be1b-4ff7c207c9e2" providerId="ADAL" clId="{D50AC27B-CB31-4AB4-88FF-8E0E079A14E2}" dt="2026-10-28T16:07:47.554" v="124" actId="1076"/>
+          <ac:picMkLst>
+            <pc:docMk/>
+            <pc:sldMk cId="1624425404" sldId="266"/>
+            <ac:picMk id="18" creationId="{10633EBF-5A3C-9972-8B9D-3D647842A74D}"/>
+          </ac:picMkLst>
+        </pc:picChg>
+        <pc:picChg chg="del">
+          <ac:chgData name="Gabriel Andrade" userId="0df7df97-c402-4ba0-be1b-4ff7c207c9e2" providerId="ADAL" clId="{D50AC27B-CB31-4AB4-88FF-8E0E079A14E2}" dt="2026-10-28T16:00:50.888" v="99" actId="478"/>
+          <ac:picMkLst>
+            <pc:docMk/>
+            <pc:sldMk cId="1624425404" sldId="266"/>
+            <ac:picMk id="1026" creationId="{9479AA01-CDD8-B297-E556-C7098DA30CBF}"/>
+          </ac:picMkLst>
+        </pc:picChg>
+        <pc:picChg chg="del">
+          <ac:chgData name="Gabriel Andrade" userId="0df7df97-c402-4ba0-be1b-4ff7c207c9e2" providerId="ADAL" clId="{D50AC27B-CB31-4AB4-88FF-8E0E079A14E2}" dt="2026-10-28T16:00:45.272" v="97" actId="478"/>
+          <ac:picMkLst>
+            <pc:docMk/>
+            <pc:sldMk cId="1624425404" sldId="266"/>
+            <ac:picMk id="1028" creationId="{0823C0B7-EDD6-49B8-244B-63037A1A6CD3}"/>
+          </ac:picMkLst>
+        </pc:picChg>
+        <pc:picChg chg="mod">
+          <ac:chgData name="Gabriel Andrade" userId="0df7df97-c402-4ba0-be1b-4ff7c207c9e2" providerId="ADAL" clId="{D50AC27B-CB31-4AB4-88FF-8E0E079A14E2}" dt="2026-10-28T16:07:48.786" v="125" actId="1076"/>
+          <ac:picMkLst>
+            <pc:docMk/>
+            <pc:sldMk cId="1624425404" sldId="266"/>
+            <ac:picMk id="1030" creationId="{E2B7548B-D304-75C4-744F-1309C596472E}"/>
+          </ac:picMkLst>
+        </pc:picChg>
+      </pc:sldChg>
+    </pc:docChg>
+  </pc:docChgLst>
 </pc:chgInfo>
 </file>
 
@@ -2083,7 +2468,7 @@
           <a:p>
             <a:fld id="{9D7E3AC9-5AFD-4174-9604-99CD15F08CCF}" type="datetimeFigureOut">
               <a:rPr lang="en-US" smtClean="0"/>
-              <a:t>10/21/2024</a:t>
+              <a:t>10/28/2026</a:t>
             </a:fld>
             <a:endParaRPr lang="en-US"/>
           </a:p>
@@ -2281,7 +2666,7 @@
           <a:p>
             <a:fld id="{9D7E3AC9-5AFD-4174-9604-99CD15F08CCF}" type="datetimeFigureOut">
               <a:rPr lang="en-US" smtClean="0"/>
-              <a:t>10/21/2024</a:t>
+              <a:t>10/28/2026</a:t>
             </a:fld>
             <a:endParaRPr lang="en-US"/>
           </a:p>
@@ -2489,7 +2874,7 @@
           <a:p>
             <a:fld id="{9D7E3AC9-5AFD-4174-9604-99CD15F08CCF}" type="datetimeFigureOut">
               <a:rPr lang="en-US" smtClean="0"/>
-              <a:t>10/21/2024</a:t>
+              <a:t>10/28/2026</a:t>
             </a:fld>
             <a:endParaRPr lang="en-US"/>
           </a:p>
@@ -2687,7 +3072,7 @@
           <a:p>
             <a:fld id="{9D7E3AC9-5AFD-4174-9604-99CD15F08CCF}" type="datetimeFigureOut">
               <a:rPr lang="en-US" smtClean="0"/>
-              <a:t>10/21/2024</a:t>
+              <a:t>10/28/2026</a:t>
             </a:fld>
             <a:endParaRPr lang="en-US"/>
           </a:p>
@@ -2962,7 +3347,7 @@
           <a:p>
             <a:fld id="{9D7E3AC9-5AFD-4174-9604-99CD15F08CCF}" type="datetimeFigureOut">
               <a:rPr lang="en-US" smtClean="0"/>
-              <a:t>10/21/2024</a:t>
+              <a:t>10/28/2026</a:t>
             </a:fld>
             <a:endParaRPr lang="en-US"/>
           </a:p>
@@ -3227,7 +3612,7 @@
           <a:p>
             <a:fld id="{9D7E3AC9-5AFD-4174-9604-99CD15F08CCF}" type="datetimeFigureOut">
               <a:rPr lang="en-US" smtClean="0"/>
-              <a:t>10/21/2024</a:t>
+              <a:t>10/28/2026</a:t>
             </a:fld>
             <a:endParaRPr lang="en-US"/>
           </a:p>
@@ -3639,7 +4024,7 @@
           <a:p>
             <a:fld id="{9D7E3AC9-5AFD-4174-9604-99CD15F08CCF}" type="datetimeFigureOut">
               <a:rPr lang="en-US" smtClean="0"/>
-              <a:t>10/21/2024</a:t>
+              <a:t>10/28/2026</a:t>
             </a:fld>
             <a:endParaRPr lang="en-US"/>
           </a:p>
@@ -3780,7 +4165,7 @@
           <a:p>
             <a:fld id="{9D7E3AC9-5AFD-4174-9604-99CD15F08CCF}" type="datetimeFigureOut">
               <a:rPr lang="en-US" smtClean="0"/>
-              <a:t>10/21/2024</a:t>
+              <a:t>10/28/2026</a:t>
             </a:fld>
             <a:endParaRPr lang="en-US"/>
           </a:p>
@@ -3893,7 +4278,7 @@
           <a:p>
             <a:fld id="{9D7E3AC9-5AFD-4174-9604-99CD15F08CCF}" type="datetimeFigureOut">
               <a:rPr lang="en-US" smtClean="0"/>
-              <a:t>10/21/2024</a:t>
+              <a:t>10/28/2026</a:t>
             </a:fld>
             <a:endParaRPr lang="en-US"/>
           </a:p>
@@ -4204,7 +4589,7 @@
           <a:p>
             <a:fld id="{9D7E3AC9-5AFD-4174-9604-99CD15F08CCF}" type="datetimeFigureOut">
               <a:rPr lang="en-US" smtClean="0"/>
-              <a:t>10/21/2024</a:t>
+              <a:t>10/28/2026</a:t>
             </a:fld>
             <a:endParaRPr lang="en-US"/>
           </a:p>
@@ -4492,7 +4877,7 @@
           <a:p>
             <a:fld id="{9D7E3AC9-5AFD-4174-9604-99CD15F08CCF}" type="datetimeFigureOut">
               <a:rPr lang="en-US" smtClean="0"/>
-              <a:t>10/21/2024</a:t>
+              <a:t>10/28/2026</a:t>
             </a:fld>
             <a:endParaRPr lang="en-US"/>
           </a:p>
@@ -4733,7 +5118,7 @@
           <a:p>
             <a:fld id="{9D7E3AC9-5AFD-4174-9604-99CD15F08CCF}" type="datetimeFigureOut">
               <a:rPr lang="en-US" smtClean="0"/>
-              <a:t>10/21/2024</a:t>
+              <a:t>10/28/2026</a:t>
             </a:fld>
             <a:endParaRPr lang="en-US"/>
           </a:p>
@@ -6039,6 +6424,423 @@
 </p:sld>
 </file>
 
+<file path=ppt/slides/slide10.xml><?xml version="1.0" encoding="utf-8"?>
+<p:sld xmlns:a="http://schemas.openxmlformats.org/drawingml/2006/main" xmlns:r="http://schemas.openxmlformats.org/officeDocument/2006/relationships" xmlns:p="http://schemas.openxmlformats.org/presentationml/2006/main">
+  <p:cSld>
+    <p:spTree>
+      <p:nvGrpSpPr>
+        <p:cNvPr id="1" name=""/>
+        <p:cNvGrpSpPr/>
+        <p:nvPr/>
+      </p:nvGrpSpPr>
+      <p:grpSpPr>
+        <a:xfrm>
+          <a:off x="0" y="0"/>
+          <a:ext cx="0" cy="0"/>
+          <a:chOff x="0" y="0"/>
+          <a:chExt cx="0" cy="0"/>
+        </a:xfrm>
+      </p:grpSpPr>
+      <p:pic>
+        <p:nvPicPr>
+          <p:cNvPr id="4" name="Picture 2" descr="87.200+ Liebre Ilustraciones de Stock, gráficos vectoriales libres de  derechos y clip art - iStock | Conejo, Tortuga, Liebre corriendo">
+            <a:extLst>
+              <a:ext uri="{FF2B5EF4-FFF2-40B4-BE49-F238E27FC236}">
+                <a16:creationId xmlns:a16="http://schemas.microsoft.com/office/drawing/2014/main" id="{2F4D65F9-AEAD-741E-E39C-BC0D51D7E2C3}"/>
+              </a:ext>
+            </a:extLst>
+          </p:cNvPr>
+          <p:cNvPicPr>
+            <a:picLocks noChangeAspect="1" noChangeArrowheads="1"/>
+          </p:cNvPicPr>
+          <p:nvPr/>
+        </p:nvPicPr>
+        <p:blipFill>
+          <a:blip r:embed="rId2">
+            <a:clrChange>
+              <a:clrFrom>
+                <a:srgbClr val="FFFFFF"/>
+              </a:clrFrom>
+              <a:clrTo>
+                <a:srgbClr val="FFFFFF">
+                  <a:alpha val="0"/>
+                </a:srgbClr>
+              </a:clrTo>
+            </a:clrChange>
+            <a:extLst>
+              <a:ext uri="{28A0092B-C50C-407E-A947-70E740481C1C}">
+                <a14:useLocalDpi xmlns:a14="http://schemas.microsoft.com/office/drawing/2010/main" val="0"/>
+              </a:ext>
+            </a:extLst>
+          </a:blip>
+          <a:srcRect/>
+          <a:stretch>
+            <a:fillRect/>
+          </a:stretch>
+        </p:blipFill>
+        <p:spPr bwMode="auto">
+          <a:xfrm>
+            <a:off x="4788996" y="1205499"/>
+            <a:ext cx="2757698" cy="1838465"/>
+          </a:xfrm>
+          <a:prstGeom prst="rect">
+            <a:avLst/>
+          </a:prstGeom>
+          <a:noFill/>
+          <a:extLst>
+            <a:ext uri="{909E8E84-426E-40DD-AFC4-6F175D3DCCD1}">
+              <a14:hiddenFill xmlns:a14="http://schemas.microsoft.com/office/drawing/2010/main">
+                <a:solidFill>
+                  <a:srgbClr val="FFFFFF"/>
+                </a:solidFill>
+              </a14:hiddenFill>
+            </a:ext>
+          </a:extLst>
+        </p:spPr>
+      </p:pic>
+      <p:pic>
+        <p:nvPicPr>
+          <p:cNvPr id="1030" name="Picture 6" descr="Bobcat Symbol Stock Illustrations – 1,299 Bobcat Symbol Stock  Illustrations, Vectors &amp; Clipart - Dreamstime">
+            <a:extLst>
+              <a:ext uri="{FF2B5EF4-FFF2-40B4-BE49-F238E27FC236}">
+                <a16:creationId xmlns:a16="http://schemas.microsoft.com/office/drawing/2014/main" id="{E2B7548B-D304-75C4-744F-1309C596472E}"/>
+              </a:ext>
+            </a:extLst>
+          </p:cNvPr>
+          <p:cNvPicPr>
+            <a:picLocks noChangeAspect="1" noChangeArrowheads="1"/>
+          </p:cNvPicPr>
+          <p:nvPr/>
+        </p:nvPicPr>
+        <p:blipFill>
+          <a:blip r:embed="rId3">
+            <a:extLst>
+              <a:ext uri="{28A0092B-C50C-407E-A947-70E740481C1C}">
+                <a14:useLocalDpi xmlns:a14="http://schemas.microsoft.com/office/drawing/2010/main" val="0"/>
+              </a:ext>
+            </a:extLst>
+          </a:blip>
+          <a:srcRect/>
+          <a:stretch>
+            <a:fillRect/>
+          </a:stretch>
+        </p:blipFill>
+        <p:spPr bwMode="auto">
+          <a:xfrm>
+            <a:off x="6807729" y="3292435"/>
+            <a:ext cx="1477929" cy="1477929"/>
+          </a:xfrm>
+          <a:prstGeom prst="rect">
+            <a:avLst/>
+          </a:prstGeom>
+          <a:noFill/>
+          <a:extLst>
+            <a:ext uri="{909E8E84-426E-40DD-AFC4-6F175D3DCCD1}">
+              <a14:hiddenFill xmlns:a14="http://schemas.microsoft.com/office/drawing/2010/main">
+                <a:solidFill>
+                  <a:srgbClr val="FFFFFF"/>
+                </a:solidFill>
+              </a14:hiddenFill>
+            </a:ext>
+          </a:extLst>
+        </p:spPr>
+      </p:pic>
+      <p:pic>
+        <p:nvPicPr>
+          <p:cNvPr id="18" name="Picture 4" descr="Grass - Free nature icons">
+            <a:extLst>
+              <a:ext uri="{FF2B5EF4-FFF2-40B4-BE49-F238E27FC236}">
+                <a16:creationId xmlns:a16="http://schemas.microsoft.com/office/drawing/2014/main" id="{10633EBF-5A3C-9972-8B9D-3D647842A74D}"/>
+              </a:ext>
+            </a:extLst>
+          </p:cNvPr>
+          <p:cNvPicPr>
+            <a:picLocks noChangeAspect="1" noChangeArrowheads="1"/>
+          </p:cNvPicPr>
+          <p:nvPr/>
+        </p:nvPicPr>
+        <p:blipFill>
+          <a:blip r:embed="rId4">
+            <a:extLst>
+              <a:ext uri="{28A0092B-C50C-407E-A947-70E740481C1C}">
+                <a14:useLocalDpi xmlns:a14="http://schemas.microsoft.com/office/drawing/2010/main" val="0"/>
+              </a:ext>
+            </a:extLst>
+          </a:blip>
+          <a:srcRect/>
+          <a:stretch>
+            <a:fillRect/>
+          </a:stretch>
+        </p:blipFill>
+        <p:spPr bwMode="auto">
+          <a:xfrm>
+            <a:off x="3857999" y="3125498"/>
+            <a:ext cx="1477929" cy="1811805"/>
+          </a:xfrm>
+          <a:prstGeom prst="rect">
+            <a:avLst/>
+          </a:prstGeom>
+          <a:noFill/>
+          <a:extLst>
+            <a:ext uri="{909E8E84-426E-40DD-AFC4-6F175D3DCCD1}">
+              <a14:hiddenFill xmlns:a14="http://schemas.microsoft.com/office/drawing/2010/main">
+                <a:solidFill>
+                  <a:srgbClr val="FFFFFF"/>
+                </a:solidFill>
+              </a14:hiddenFill>
+            </a:ext>
+          </a:extLst>
+        </p:spPr>
+      </p:pic>
+      <p:sp>
+        <p:nvSpPr>
+          <p:cNvPr id="2" name="Arrow: Right 1">
+            <a:extLst>
+              <a:ext uri="{FF2B5EF4-FFF2-40B4-BE49-F238E27FC236}">
+                <a16:creationId xmlns:a16="http://schemas.microsoft.com/office/drawing/2014/main" id="{7E203289-6D1A-006D-BBC0-0663AC560F27}"/>
+              </a:ext>
+            </a:extLst>
+          </p:cNvPr>
+          <p:cNvSpPr/>
+          <p:nvPr/>
+        </p:nvSpPr>
+        <p:spPr>
+          <a:xfrm rot="18495924">
+            <a:off x="4686556" y="2739709"/>
+            <a:ext cx="808924" cy="318979"/>
+          </a:xfrm>
+          <a:prstGeom prst="rightArrow">
+            <a:avLst/>
+          </a:prstGeom>
+          <a:solidFill>
+            <a:srgbClr val="7030A0"/>
+          </a:solidFill>
+        </p:spPr>
+        <p:style>
+          <a:lnRef idx="2">
+            <a:schemeClr val="accent1">
+              <a:shade val="50000"/>
+            </a:schemeClr>
+          </a:lnRef>
+          <a:fillRef idx="1">
+            <a:schemeClr val="accent1"/>
+          </a:fillRef>
+          <a:effectRef idx="0">
+            <a:schemeClr val="accent1"/>
+          </a:effectRef>
+          <a:fontRef idx="minor">
+            <a:schemeClr val="lt1"/>
+          </a:fontRef>
+        </p:style>
+        <p:txBody>
+          <a:bodyPr rtlCol="0" anchor="ctr"/>
+          <a:lstStyle/>
+          <a:p>
+            <a:pPr algn="ctr"/>
+            <a:endParaRPr lang="en-US"/>
+          </a:p>
+        </p:txBody>
+      </p:sp>
+      <p:sp>
+        <p:nvSpPr>
+          <p:cNvPr id="3" name="Arrow: Right 2">
+            <a:extLst>
+              <a:ext uri="{FF2B5EF4-FFF2-40B4-BE49-F238E27FC236}">
+                <a16:creationId xmlns:a16="http://schemas.microsoft.com/office/drawing/2014/main" id="{674C8C01-21ED-9CAC-A452-3CF4E6AF7B2D}"/>
+              </a:ext>
+            </a:extLst>
+          </p:cNvPr>
+          <p:cNvSpPr/>
+          <p:nvPr/>
+        </p:nvSpPr>
+        <p:spPr>
+          <a:xfrm rot="10800000">
+            <a:off x="5667366" y="4149701"/>
+            <a:ext cx="808924" cy="318979"/>
+          </a:xfrm>
+          <a:prstGeom prst="rightArrow">
+            <a:avLst/>
+          </a:prstGeom>
+          <a:solidFill>
+            <a:srgbClr val="7030A0"/>
+          </a:solidFill>
+        </p:spPr>
+        <p:style>
+          <a:lnRef idx="2">
+            <a:schemeClr val="accent1">
+              <a:shade val="50000"/>
+            </a:schemeClr>
+          </a:lnRef>
+          <a:fillRef idx="1">
+            <a:schemeClr val="accent1"/>
+          </a:fillRef>
+          <a:effectRef idx="0">
+            <a:schemeClr val="accent1"/>
+          </a:effectRef>
+          <a:fontRef idx="minor">
+            <a:schemeClr val="lt1"/>
+          </a:fontRef>
+        </p:style>
+        <p:txBody>
+          <a:bodyPr rtlCol="0" anchor="ctr"/>
+          <a:lstStyle/>
+          <a:p>
+            <a:pPr algn="ctr"/>
+            <a:endParaRPr lang="en-US"/>
+          </a:p>
+        </p:txBody>
+      </p:sp>
+      <p:sp>
+        <p:nvSpPr>
+          <p:cNvPr id="26" name="TextBox 25">
+            <a:extLst>
+              <a:ext uri="{FF2B5EF4-FFF2-40B4-BE49-F238E27FC236}">
+                <a16:creationId xmlns:a16="http://schemas.microsoft.com/office/drawing/2014/main" id="{A3F3C180-BE74-950E-8516-C839142F15E9}"/>
+              </a:ext>
+            </a:extLst>
+          </p:cNvPr>
+          <p:cNvSpPr txBox="1"/>
+          <p:nvPr/>
+        </p:nvSpPr>
+        <p:spPr>
+          <a:xfrm>
+            <a:off x="2916805" y="251392"/>
+            <a:ext cx="6502079" cy="954107"/>
+          </a:xfrm>
+          <a:prstGeom prst="rect">
+            <a:avLst/>
+          </a:prstGeom>
+          <a:noFill/>
+        </p:spPr>
+        <p:txBody>
+          <a:bodyPr wrap="square">
+            <a:spAutoFit/>
+          </a:bodyPr>
+          <a:lstStyle/>
+          <a:p>
+            <a:pPr algn="ctr"/>
+            <a:r>
+              <a:rPr lang="en-US" sz="2800" dirty="0">
+                <a:latin typeface="Bahnschrift SemiBold SemiConden" panose="020B0502040204020203" pitchFamily="34" charset="0"/>
+              </a:rPr>
+              <a:t>Does predator abundance influence where rabbits forage?</a:t>
+            </a:r>
+          </a:p>
+        </p:txBody>
+      </p:sp>
+    </p:spTree>
+    <p:extLst>
+      <p:ext uri="{BB962C8B-B14F-4D97-AF65-F5344CB8AC3E}">
+        <p14:creationId xmlns:p14="http://schemas.microsoft.com/office/powerpoint/2010/main" val="1624425404"/>
+      </p:ext>
+    </p:extLst>
+  </p:cSld>
+  <p:clrMapOvr>
+    <a:masterClrMapping/>
+  </p:clrMapOvr>
+</p:sld>
+</file>
+
+<file path=ppt/slides/slide11.xml><?xml version="1.0" encoding="utf-8"?>
+<p:sld xmlns:a="http://schemas.openxmlformats.org/drawingml/2006/main" xmlns:r="http://schemas.openxmlformats.org/officeDocument/2006/relationships" xmlns:p="http://schemas.openxmlformats.org/presentationml/2006/main">
+  <p:cSld>
+    <p:spTree>
+      <p:nvGrpSpPr>
+        <p:cNvPr id="1" name=""/>
+        <p:cNvGrpSpPr/>
+        <p:nvPr/>
+      </p:nvGrpSpPr>
+      <p:grpSpPr>
+        <a:xfrm>
+          <a:off x="0" y="0"/>
+          <a:ext cx="0" cy="0"/>
+          <a:chOff x="0" y="0"/>
+          <a:chExt cx="0" cy="0"/>
+        </a:xfrm>
+      </p:grpSpPr>
+      <p:pic>
+        <p:nvPicPr>
+          <p:cNvPr id="5" name="Picture 4">
+            <a:extLst>
+              <a:ext uri="{FF2B5EF4-FFF2-40B4-BE49-F238E27FC236}">
+                <a16:creationId xmlns:a16="http://schemas.microsoft.com/office/drawing/2014/main" id="{759EE8AD-6B93-A50F-FBB0-D7115FDAA304}"/>
+              </a:ext>
+            </a:extLst>
+          </p:cNvPr>
+          <p:cNvPicPr>
+            <a:picLocks noChangeAspect="1"/>
+          </p:cNvPicPr>
+          <p:nvPr/>
+        </p:nvPicPr>
+        <p:blipFill>
+          <a:blip r:embed="rId2">
+            <a:extLst>
+              <a:ext uri="{28A0092B-C50C-407E-A947-70E740481C1C}">
+                <a14:useLocalDpi xmlns:a14="http://schemas.microsoft.com/office/drawing/2010/main" val="0"/>
+              </a:ext>
+            </a:extLst>
+          </a:blip>
+          <a:srcRect b="93142"/>
+          <a:stretch/>
+        </p:blipFill>
+        <p:spPr>
+          <a:xfrm>
+            <a:off x="899" y="1250065"/>
+            <a:ext cx="11433615" cy="1088022"/>
+          </a:xfrm>
+          <a:prstGeom prst="rect">
+            <a:avLst/>
+          </a:prstGeom>
+        </p:spPr>
+      </p:pic>
+      <p:pic>
+        <p:nvPicPr>
+          <p:cNvPr id="7" name="Picture 6">
+            <a:extLst>
+              <a:ext uri="{FF2B5EF4-FFF2-40B4-BE49-F238E27FC236}">
+                <a16:creationId xmlns:a16="http://schemas.microsoft.com/office/drawing/2014/main" id="{A8BD7F0D-BCEB-2FFF-BF79-0FEE57C0FC4C}"/>
+              </a:ext>
+            </a:extLst>
+          </p:cNvPr>
+          <p:cNvPicPr>
+            <a:picLocks noChangeAspect="1"/>
+          </p:cNvPicPr>
+          <p:nvPr/>
+        </p:nvPicPr>
+        <p:blipFill>
+          <a:blip r:embed="rId2">
+            <a:extLst>
+              <a:ext uri="{28A0092B-C50C-407E-A947-70E740481C1C}">
+                <a14:useLocalDpi xmlns:a14="http://schemas.microsoft.com/office/drawing/2010/main" val="0"/>
+              </a:ext>
+            </a:extLst>
+          </a:blip>
+          <a:srcRect t="53333" b="34346"/>
+          <a:stretch/>
+        </p:blipFill>
+        <p:spPr>
+          <a:xfrm>
+            <a:off x="28141" y="2536075"/>
+            <a:ext cx="11433615" cy="1954749"/>
+          </a:xfrm>
+          <a:prstGeom prst="rect">
+            <a:avLst/>
+          </a:prstGeom>
+        </p:spPr>
+      </p:pic>
+    </p:spTree>
+    <p:extLst>
+      <p:ext uri="{BB962C8B-B14F-4D97-AF65-F5344CB8AC3E}">
+        <p14:creationId xmlns:p14="http://schemas.microsoft.com/office/powerpoint/2010/main" val="1195098065"/>
+      </p:ext>
+    </p:extLst>
+  </p:cSld>
+  <p:clrMapOvr>
+    <a:masterClrMapping/>
+  </p:clrMapOvr>
+</p:sld>
+</file>
+
 <file path=ppt/slides/slide2.xml><?xml version="1.0" encoding="utf-8"?>
 <p:sld xmlns:a="http://schemas.openxmlformats.org/drawingml/2006/main" xmlns:r="http://schemas.openxmlformats.org/officeDocument/2006/relationships" xmlns:p="http://schemas.openxmlformats.org/presentationml/2006/main">
   <p:cSld>
@@ -12688,6 +13490,1182 @@
     <p:extLst>
       <p:ext uri="{BB962C8B-B14F-4D97-AF65-F5344CB8AC3E}">
         <p14:creationId xmlns:p14="http://schemas.microsoft.com/office/powerpoint/2010/main" val="1923367497"/>
+      </p:ext>
+    </p:extLst>
+  </p:cSld>
+  <p:clrMapOvr>
+    <a:masterClrMapping/>
+  </p:clrMapOvr>
+</p:sld>
+</file>
+
+<file path=ppt/slides/slide9.xml><?xml version="1.0" encoding="utf-8"?>
+<p:sld xmlns:a="http://schemas.openxmlformats.org/drawingml/2006/main" xmlns:r="http://schemas.openxmlformats.org/officeDocument/2006/relationships" xmlns:p="http://schemas.openxmlformats.org/presentationml/2006/main">
+  <p:cSld>
+    <p:spTree>
+      <p:nvGrpSpPr>
+        <p:cNvPr id="1" name=""/>
+        <p:cNvGrpSpPr/>
+        <p:nvPr/>
+      </p:nvGrpSpPr>
+      <p:grpSpPr>
+        <a:xfrm>
+          <a:off x="0" y="0"/>
+          <a:ext cx="0" cy="0"/>
+          <a:chOff x="0" y="0"/>
+          <a:chExt cx="0" cy="0"/>
+        </a:xfrm>
+      </p:grpSpPr>
+      <p:pic>
+        <p:nvPicPr>
+          <p:cNvPr id="4" name="Picture 2" descr="87.200+ Liebre Ilustraciones de Stock, gráficos vectoriales libres de  derechos y clip art - iStock | Conejo, Tortuga, Liebre corriendo">
+            <a:extLst>
+              <a:ext uri="{FF2B5EF4-FFF2-40B4-BE49-F238E27FC236}">
+                <a16:creationId xmlns:a16="http://schemas.microsoft.com/office/drawing/2014/main" id="{2F4D65F9-AEAD-741E-E39C-BC0D51D7E2C3}"/>
+              </a:ext>
+            </a:extLst>
+          </p:cNvPr>
+          <p:cNvPicPr>
+            <a:picLocks noChangeAspect="1" noChangeArrowheads="1"/>
+          </p:cNvPicPr>
+          <p:nvPr/>
+        </p:nvPicPr>
+        <p:blipFill>
+          <a:blip r:embed="rId2">
+            <a:clrChange>
+              <a:clrFrom>
+                <a:srgbClr val="FFFFFF"/>
+              </a:clrFrom>
+              <a:clrTo>
+                <a:srgbClr val="FFFFFF">
+                  <a:alpha val="0"/>
+                </a:srgbClr>
+              </a:clrTo>
+            </a:clrChange>
+            <a:extLst>
+              <a:ext uri="{28A0092B-C50C-407E-A947-70E740481C1C}">
+                <a14:useLocalDpi xmlns:a14="http://schemas.microsoft.com/office/drawing/2010/main" val="0"/>
+              </a:ext>
+            </a:extLst>
+          </a:blip>
+          <a:srcRect/>
+          <a:stretch>
+            <a:fillRect/>
+          </a:stretch>
+        </p:blipFill>
+        <p:spPr bwMode="auto">
+          <a:xfrm>
+            <a:off x="4765955" y="3137574"/>
+            <a:ext cx="2367900" cy="1578600"/>
+          </a:xfrm>
+          <a:prstGeom prst="rect">
+            <a:avLst/>
+          </a:prstGeom>
+          <a:noFill/>
+          <a:extLst>
+            <a:ext uri="{909E8E84-426E-40DD-AFC4-6F175D3DCCD1}">
+              <a14:hiddenFill xmlns:a14="http://schemas.microsoft.com/office/drawing/2010/main">
+                <a:solidFill>
+                  <a:srgbClr val="FFFFFF"/>
+                </a:solidFill>
+              </a14:hiddenFill>
+            </a:ext>
+          </a:extLst>
+        </p:spPr>
+      </p:pic>
+      <p:grpSp>
+        <p:nvGrpSpPr>
+          <p:cNvPr id="19" name="Group 18">
+            <a:extLst>
+              <a:ext uri="{FF2B5EF4-FFF2-40B4-BE49-F238E27FC236}">
+                <a16:creationId xmlns:a16="http://schemas.microsoft.com/office/drawing/2014/main" id="{0390CAAF-EA64-1F12-27FD-ED798CE10BB0}"/>
+              </a:ext>
+            </a:extLst>
+          </p:cNvPr>
+          <p:cNvGrpSpPr/>
+          <p:nvPr/>
+        </p:nvGrpSpPr>
+        <p:grpSpPr>
+          <a:xfrm>
+            <a:off x="2542689" y="1943522"/>
+            <a:ext cx="1516857" cy="1315760"/>
+            <a:chOff x="2542689" y="1952982"/>
+            <a:chExt cx="1516857" cy="1315760"/>
+          </a:xfrm>
+        </p:grpSpPr>
+        <p:pic>
+          <p:nvPicPr>
+            <p:cNvPr id="5" name="Picture 6" descr="Green stylized bush icon Royalty Free Vector Image">
+              <a:extLst>
+                <a:ext uri="{FF2B5EF4-FFF2-40B4-BE49-F238E27FC236}">
+                  <a16:creationId xmlns:a16="http://schemas.microsoft.com/office/drawing/2014/main" id="{3803B8FB-8899-EEE6-FD65-A51F93ADCF5A}"/>
+                </a:ext>
+              </a:extLst>
+            </p:cNvPr>
+            <p:cNvPicPr>
+              <a:picLocks noChangeAspect="1" noChangeArrowheads="1"/>
+            </p:cNvPicPr>
+            <p:nvPr/>
+          </p:nvPicPr>
+          <p:blipFill rotWithShape="1">
+            <a:blip r:embed="rId3">
+              <a:clrChange>
+                <a:clrFrom>
+                  <a:srgbClr val="FFFFFF"/>
+                </a:clrFrom>
+                <a:clrTo>
+                  <a:srgbClr val="FFFFFF">
+                    <a:alpha val="0"/>
+                  </a:srgbClr>
+                </a:clrTo>
+              </a:clrChange>
+              <a:extLst>
+                <a:ext uri="{28A0092B-C50C-407E-A947-70E740481C1C}">
+                  <a14:useLocalDpi xmlns:a14="http://schemas.microsoft.com/office/drawing/2010/main" val="0"/>
+                </a:ext>
+              </a:extLst>
+            </a:blip>
+            <a:srcRect t="26181" r="2874" b="31628"/>
+            <a:stretch/>
+          </p:blipFill>
+          <p:spPr bwMode="auto">
+            <a:xfrm>
+              <a:off x="2735962" y="2783695"/>
+              <a:ext cx="652572" cy="308623"/>
+            </a:xfrm>
+            <a:prstGeom prst="rect">
+              <a:avLst/>
+            </a:prstGeom>
+            <a:noFill/>
+            <a:extLst>
+              <a:ext uri="{909E8E84-426E-40DD-AFC4-6F175D3DCCD1}">
+                <a14:hiddenFill xmlns:a14="http://schemas.microsoft.com/office/drawing/2010/main">
+                  <a:solidFill>
+                    <a:srgbClr val="FFFFFF"/>
+                  </a:solidFill>
+                </a14:hiddenFill>
+              </a:ext>
+            </a:extLst>
+          </p:spPr>
+        </p:pic>
+        <p:sp>
+          <p:nvSpPr>
+            <p:cNvPr id="6" name="Oval 5">
+              <a:extLst>
+                <a:ext uri="{FF2B5EF4-FFF2-40B4-BE49-F238E27FC236}">
+                  <a16:creationId xmlns:a16="http://schemas.microsoft.com/office/drawing/2014/main" id="{C9B4CC99-B754-75DD-6BE3-B5F6F9CCB7D8}"/>
+                </a:ext>
+              </a:extLst>
+            </p:cNvPr>
+            <p:cNvSpPr/>
+            <p:nvPr/>
+          </p:nvSpPr>
+          <p:spPr>
+            <a:xfrm>
+              <a:off x="2542689" y="1952982"/>
+              <a:ext cx="1516857" cy="1296839"/>
+            </a:xfrm>
+            <a:prstGeom prst="ellipse">
+              <a:avLst/>
+            </a:prstGeom>
+            <a:noFill/>
+            <a:ln w="38100">
+              <a:solidFill>
+                <a:schemeClr val="accent6">
+                  <a:lumMod val="60000"/>
+                  <a:lumOff val="40000"/>
+                </a:schemeClr>
+              </a:solidFill>
+            </a:ln>
+          </p:spPr>
+          <p:style>
+            <a:lnRef idx="2">
+              <a:schemeClr val="accent1">
+                <a:shade val="50000"/>
+              </a:schemeClr>
+            </a:lnRef>
+            <a:fillRef idx="1">
+              <a:schemeClr val="accent1"/>
+            </a:fillRef>
+            <a:effectRef idx="0">
+              <a:schemeClr val="accent1"/>
+            </a:effectRef>
+            <a:fontRef idx="minor">
+              <a:schemeClr val="lt1"/>
+            </a:fontRef>
+          </p:style>
+          <p:txBody>
+            <a:bodyPr rtlCol="0" anchor="ctr"/>
+            <a:lstStyle/>
+            <a:p>
+              <a:pPr algn="ctr"/>
+              <a:endParaRPr lang="en-US"/>
+            </a:p>
+          </p:txBody>
+        </p:sp>
+        <p:pic>
+          <p:nvPicPr>
+            <p:cNvPr id="7" name="Picture 8" descr="Free Tree SVG, PNG Icon, Symbol. Download Image.">
+              <a:extLst>
+                <a:ext uri="{FF2B5EF4-FFF2-40B4-BE49-F238E27FC236}">
+                  <a16:creationId xmlns:a16="http://schemas.microsoft.com/office/drawing/2014/main" id="{528DEAE8-2A31-7477-545A-A36FC1D655B9}"/>
+                </a:ext>
+              </a:extLst>
+            </p:cNvPr>
+            <p:cNvPicPr>
+              <a:picLocks noChangeAspect="1" noChangeArrowheads="1"/>
+            </p:cNvPicPr>
+            <p:nvPr/>
+          </p:nvPicPr>
+          <p:blipFill>
+            <a:blip r:embed="rId4">
+              <a:extLst>
+                <a:ext uri="{28A0092B-C50C-407E-A947-70E740481C1C}">
+                  <a14:useLocalDpi xmlns:a14="http://schemas.microsoft.com/office/drawing/2010/main" val="0"/>
+                </a:ext>
+              </a:extLst>
+            </a:blip>
+            <a:srcRect/>
+            <a:stretch>
+              <a:fillRect/>
+            </a:stretch>
+          </p:blipFill>
+          <p:spPr bwMode="auto">
+            <a:xfrm>
+              <a:off x="3008369" y="2264648"/>
+              <a:ext cx="807774" cy="807774"/>
+            </a:xfrm>
+            <a:prstGeom prst="rect">
+              <a:avLst/>
+            </a:prstGeom>
+            <a:noFill/>
+            <a:extLst>
+              <a:ext uri="{909E8E84-426E-40DD-AFC4-6F175D3DCCD1}">
+                <a14:hiddenFill xmlns:a14="http://schemas.microsoft.com/office/drawing/2010/main">
+                  <a:solidFill>
+                    <a:srgbClr val="FFFFFF"/>
+                  </a:solidFill>
+                </a14:hiddenFill>
+              </a:ext>
+            </a:extLst>
+          </p:spPr>
+        </p:pic>
+        <p:pic>
+          <p:nvPicPr>
+            <p:cNvPr id="8" name="Picture 4" descr="Grass - Free nature icons">
+              <a:extLst>
+                <a:ext uri="{FF2B5EF4-FFF2-40B4-BE49-F238E27FC236}">
+                  <a16:creationId xmlns:a16="http://schemas.microsoft.com/office/drawing/2014/main" id="{066F0000-2205-505F-76FF-64EF1468DC43}"/>
+                </a:ext>
+              </a:extLst>
+            </p:cNvPr>
+            <p:cNvPicPr>
+              <a:picLocks noChangeAspect="1" noChangeArrowheads="1"/>
+            </p:cNvPicPr>
+            <p:nvPr/>
+          </p:nvPicPr>
+          <p:blipFill>
+            <a:blip r:embed="rId5">
+              <a:extLst>
+                <a:ext uri="{28A0092B-C50C-407E-A947-70E740481C1C}">
+                  <a14:useLocalDpi xmlns:a14="http://schemas.microsoft.com/office/drawing/2010/main" val="0"/>
+                </a:ext>
+              </a:extLst>
+            </a:blip>
+            <a:srcRect/>
+            <a:stretch>
+              <a:fillRect/>
+            </a:stretch>
+          </p:blipFill>
+          <p:spPr bwMode="auto">
+            <a:xfrm>
+              <a:off x="3096912" y="2916928"/>
+              <a:ext cx="199414" cy="199414"/>
+            </a:xfrm>
+            <a:prstGeom prst="rect">
+              <a:avLst/>
+            </a:prstGeom>
+            <a:noFill/>
+            <a:extLst>
+              <a:ext uri="{909E8E84-426E-40DD-AFC4-6F175D3DCCD1}">
+                <a14:hiddenFill xmlns:a14="http://schemas.microsoft.com/office/drawing/2010/main">
+                  <a:solidFill>
+                    <a:srgbClr val="FFFFFF"/>
+                  </a:solidFill>
+                </a14:hiddenFill>
+              </a:ext>
+            </a:extLst>
+          </p:spPr>
+        </p:pic>
+        <p:pic>
+          <p:nvPicPr>
+            <p:cNvPr id="9" name="Picture 6" descr="Green stylized bush icon Royalty Free Vector Image">
+              <a:extLst>
+                <a:ext uri="{FF2B5EF4-FFF2-40B4-BE49-F238E27FC236}">
+                  <a16:creationId xmlns:a16="http://schemas.microsoft.com/office/drawing/2014/main" id="{47E32DE3-0768-589E-53F9-5F2ABDF40BD6}"/>
+                </a:ext>
+              </a:extLst>
+            </p:cNvPr>
+            <p:cNvPicPr>
+              <a:picLocks noChangeAspect="1" noChangeArrowheads="1"/>
+            </p:cNvPicPr>
+            <p:nvPr/>
+          </p:nvPicPr>
+          <p:blipFill rotWithShape="1">
+            <a:blip r:embed="rId3">
+              <a:clrChange>
+                <a:clrFrom>
+                  <a:srgbClr val="FFFFFF"/>
+                </a:clrFrom>
+                <a:clrTo>
+                  <a:srgbClr val="FFFFFF">
+                    <a:alpha val="0"/>
+                  </a:srgbClr>
+                </a:clrTo>
+              </a:clrChange>
+              <a:extLst>
+                <a:ext uri="{28A0092B-C50C-407E-A947-70E740481C1C}">
+                  <a14:useLocalDpi xmlns:a14="http://schemas.microsoft.com/office/drawing/2010/main" val="0"/>
+                </a:ext>
+              </a:extLst>
+            </a:blip>
+            <a:srcRect t="26181" r="2874" b="31628"/>
+            <a:stretch/>
+          </p:blipFill>
+          <p:spPr bwMode="auto">
+            <a:xfrm>
+              <a:off x="3126792" y="2944922"/>
+              <a:ext cx="652572" cy="221127"/>
+            </a:xfrm>
+            <a:prstGeom prst="rect">
+              <a:avLst/>
+            </a:prstGeom>
+            <a:noFill/>
+            <a:extLst>
+              <a:ext uri="{909E8E84-426E-40DD-AFC4-6F175D3DCCD1}">
+                <a14:hiddenFill xmlns:a14="http://schemas.microsoft.com/office/drawing/2010/main">
+                  <a:solidFill>
+                    <a:srgbClr val="FFFFFF"/>
+                  </a:solidFill>
+                </a14:hiddenFill>
+              </a:ext>
+            </a:extLst>
+          </p:spPr>
+        </p:pic>
+        <p:pic>
+          <p:nvPicPr>
+            <p:cNvPr id="10" name="Picture 4" descr="Grass - Free nature icons">
+              <a:extLst>
+                <a:ext uri="{FF2B5EF4-FFF2-40B4-BE49-F238E27FC236}">
+                  <a16:creationId xmlns:a16="http://schemas.microsoft.com/office/drawing/2014/main" id="{53BEFEEB-088B-9C4C-A16E-C756AB76B249}"/>
+                </a:ext>
+              </a:extLst>
+            </p:cNvPr>
+            <p:cNvPicPr>
+              <a:picLocks noChangeAspect="1" noChangeArrowheads="1"/>
+            </p:cNvPicPr>
+            <p:nvPr/>
+          </p:nvPicPr>
+          <p:blipFill>
+            <a:blip r:embed="rId5">
+              <a:extLst>
+                <a:ext uri="{28A0092B-C50C-407E-A947-70E740481C1C}">
+                  <a14:useLocalDpi xmlns:a14="http://schemas.microsoft.com/office/drawing/2010/main" val="0"/>
+                </a:ext>
+              </a:extLst>
+            </a:blip>
+            <a:srcRect/>
+            <a:stretch>
+              <a:fillRect/>
+            </a:stretch>
+          </p:blipFill>
+          <p:spPr bwMode="auto">
+            <a:xfrm>
+              <a:off x="2956419" y="2953412"/>
+              <a:ext cx="199414" cy="199414"/>
+            </a:xfrm>
+            <a:prstGeom prst="rect">
+              <a:avLst/>
+            </a:prstGeom>
+            <a:noFill/>
+            <a:extLst>
+              <a:ext uri="{909E8E84-426E-40DD-AFC4-6F175D3DCCD1}">
+                <a14:hiddenFill xmlns:a14="http://schemas.microsoft.com/office/drawing/2010/main">
+                  <a:solidFill>
+                    <a:srgbClr val="FFFFFF"/>
+                  </a:solidFill>
+                </a14:hiddenFill>
+              </a:ext>
+            </a:extLst>
+          </p:spPr>
+        </p:pic>
+        <p:pic>
+          <p:nvPicPr>
+            <p:cNvPr id="11" name="Picture 4" descr="Grass - Free nature icons">
+              <a:extLst>
+                <a:ext uri="{FF2B5EF4-FFF2-40B4-BE49-F238E27FC236}">
+                  <a16:creationId xmlns:a16="http://schemas.microsoft.com/office/drawing/2014/main" id="{A6BF2605-74A9-D9AC-B72E-6254D2960E8E}"/>
+                </a:ext>
+              </a:extLst>
+            </p:cNvPr>
+            <p:cNvPicPr>
+              <a:picLocks noChangeAspect="1" noChangeArrowheads="1"/>
+            </p:cNvPicPr>
+            <p:nvPr/>
+          </p:nvPicPr>
+          <p:blipFill>
+            <a:blip r:embed="rId5">
+              <a:extLst>
+                <a:ext uri="{28A0092B-C50C-407E-A947-70E740481C1C}">
+                  <a14:useLocalDpi xmlns:a14="http://schemas.microsoft.com/office/drawing/2010/main" val="0"/>
+                </a:ext>
+              </a:extLst>
+            </a:blip>
+            <a:srcRect/>
+            <a:stretch>
+              <a:fillRect/>
+            </a:stretch>
+          </p:blipFill>
+          <p:spPr bwMode="auto">
+            <a:xfrm>
+              <a:off x="3162644" y="2982682"/>
+              <a:ext cx="199414" cy="199414"/>
+            </a:xfrm>
+            <a:prstGeom prst="rect">
+              <a:avLst/>
+            </a:prstGeom>
+            <a:noFill/>
+            <a:extLst>
+              <a:ext uri="{909E8E84-426E-40DD-AFC4-6F175D3DCCD1}">
+                <a14:hiddenFill xmlns:a14="http://schemas.microsoft.com/office/drawing/2010/main">
+                  <a:solidFill>
+                    <a:srgbClr val="FFFFFF"/>
+                  </a:solidFill>
+                </a14:hiddenFill>
+              </a:ext>
+            </a:extLst>
+          </p:spPr>
+        </p:pic>
+        <p:pic>
+          <p:nvPicPr>
+            <p:cNvPr id="12" name="Picture 4" descr="Grass - Free nature icons">
+              <a:extLst>
+                <a:ext uri="{FF2B5EF4-FFF2-40B4-BE49-F238E27FC236}">
+                  <a16:creationId xmlns:a16="http://schemas.microsoft.com/office/drawing/2014/main" id="{4CC7A48C-87C6-E7DE-DB58-A8CEDBFC003B}"/>
+                </a:ext>
+              </a:extLst>
+            </p:cNvPr>
+            <p:cNvPicPr>
+              <a:picLocks noChangeAspect="1" noChangeArrowheads="1"/>
+            </p:cNvPicPr>
+            <p:nvPr/>
+          </p:nvPicPr>
+          <p:blipFill>
+            <a:blip r:embed="rId5">
+              <a:extLst>
+                <a:ext uri="{28A0092B-C50C-407E-A947-70E740481C1C}">
+                  <a14:useLocalDpi xmlns:a14="http://schemas.microsoft.com/office/drawing/2010/main" val="0"/>
+                </a:ext>
+              </a:extLst>
+            </a:blip>
+            <a:srcRect/>
+            <a:stretch>
+              <a:fillRect/>
+            </a:stretch>
+          </p:blipFill>
+          <p:spPr bwMode="auto">
+            <a:xfrm>
+              <a:off x="3085532" y="3023198"/>
+              <a:ext cx="199414" cy="199414"/>
+            </a:xfrm>
+            <a:prstGeom prst="rect">
+              <a:avLst/>
+            </a:prstGeom>
+            <a:noFill/>
+            <a:extLst>
+              <a:ext uri="{909E8E84-426E-40DD-AFC4-6F175D3DCCD1}">
+                <a14:hiddenFill xmlns:a14="http://schemas.microsoft.com/office/drawing/2010/main">
+                  <a:solidFill>
+                    <a:srgbClr val="FFFFFF"/>
+                  </a:solidFill>
+                </a14:hiddenFill>
+              </a:ext>
+            </a:extLst>
+          </p:spPr>
+        </p:pic>
+        <p:pic>
+          <p:nvPicPr>
+            <p:cNvPr id="13" name="Picture 4" descr="Grass - Free nature icons">
+              <a:extLst>
+                <a:ext uri="{FF2B5EF4-FFF2-40B4-BE49-F238E27FC236}">
+                  <a16:creationId xmlns:a16="http://schemas.microsoft.com/office/drawing/2014/main" id="{71C27DF5-78C8-6FDB-5D69-0D8A36B36723}"/>
+                </a:ext>
+              </a:extLst>
+            </p:cNvPr>
+            <p:cNvPicPr>
+              <a:picLocks noChangeAspect="1" noChangeArrowheads="1"/>
+            </p:cNvPicPr>
+            <p:nvPr/>
+          </p:nvPicPr>
+          <p:blipFill>
+            <a:blip r:embed="rId5">
+              <a:extLst>
+                <a:ext uri="{28A0092B-C50C-407E-A947-70E740481C1C}">
+                  <a14:useLocalDpi xmlns:a14="http://schemas.microsoft.com/office/drawing/2010/main" val="0"/>
+                </a:ext>
+              </a:extLst>
+            </a:blip>
+            <a:srcRect/>
+            <a:stretch>
+              <a:fillRect/>
+            </a:stretch>
+          </p:blipFill>
+          <p:spPr bwMode="auto">
+            <a:xfrm>
+              <a:off x="2862363" y="2992611"/>
+              <a:ext cx="199414" cy="199414"/>
+            </a:xfrm>
+            <a:prstGeom prst="rect">
+              <a:avLst/>
+            </a:prstGeom>
+            <a:noFill/>
+            <a:extLst>
+              <a:ext uri="{909E8E84-426E-40DD-AFC4-6F175D3DCCD1}">
+                <a14:hiddenFill xmlns:a14="http://schemas.microsoft.com/office/drawing/2010/main">
+                  <a:solidFill>
+                    <a:srgbClr val="FFFFFF"/>
+                  </a:solidFill>
+                </a14:hiddenFill>
+              </a:ext>
+            </a:extLst>
+          </p:spPr>
+        </p:pic>
+        <p:pic>
+          <p:nvPicPr>
+            <p:cNvPr id="14" name="Picture 4" descr="Grass - Free nature icons">
+              <a:extLst>
+                <a:ext uri="{FF2B5EF4-FFF2-40B4-BE49-F238E27FC236}">
+                  <a16:creationId xmlns:a16="http://schemas.microsoft.com/office/drawing/2014/main" id="{F02739D7-4EB4-5417-2443-C7F315A42B1A}"/>
+                </a:ext>
+              </a:extLst>
+            </p:cNvPr>
+            <p:cNvPicPr>
+              <a:picLocks noChangeAspect="1" noChangeArrowheads="1"/>
+            </p:cNvPicPr>
+            <p:nvPr/>
+          </p:nvPicPr>
+          <p:blipFill>
+            <a:blip r:embed="rId5">
+              <a:extLst>
+                <a:ext uri="{28A0092B-C50C-407E-A947-70E740481C1C}">
+                  <a14:useLocalDpi xmlns:a14="http://schemas.microsoft.com/office/drawing/2010/main" val="0"/>
+                </a:ext>
+              </a:extLst>
+            </a:blip>
+            <a:srcRect/>
+            <a:stretch>
+              <a:fillRect/>
+            </a:stretch>
+          </p:blipFill>
+          <p:spPr bwMode="auto">
+            <a:xfrm>
+              <a:off x="3189120" y="3062407"/>
+              <a:ext cx="199414" cy="199414"/>
+            </a:xfrm>
+            <a:prstGeom prst="rect">
+              <a:avLst/>
+            </a:prstGeom>
+            <a:noFill/>
+            <a:extLst>
+              <a:ext uri="{909E8E84-426E-40DD-AFC4-6F175D3DCCD1}">
+                <a14:hiddenFill xmlns:a14="http://schemas.microsoft.com/office/drawing/2010/main">
+                  <a:solidFill>
+                    <a:srgbClr val="FFFFFF"/>
+                  </a:solidFill>
+                </a14:hiddenFill>
+              </a:ext>
+            </a:extLst>
+          </p:spPr>
+        </p:pic>
+        <p:pic>
+          <p:nvPicPr>
+            <p:cNvPr id="15" name="Picture 4" descr="Grass - Free nature icons">
+              <a:extLst>
+                <a:ext uri="{FF2B5EF4-FFF2-40B4-BE49-F238E27FC236}">
+                  <a16:creationId xmlns:a16="http://schemas.microsoft.com/office/drawing/2014/main" id="{1F6EAF15-8A31-AF5C-7209-89500CD53F60}"/>
+                </a:ext>
+              </a:extLst>
+            </p:cNvPr>
+            <p:cNvPicPr>
+              <a:picLocks noChangeAspect="1" noChangeArrowheads="1"/>
+            </p:cNvPicPr>
+            <p:nvPr/>
+          </p:nvPicPr>
+          <p:blipFill>
+            <a:blip r:embed="rId5">
+              <a:extLst>
+                <a:ext uri="{28A0092B-C50C-407E-A947-70E740481C1C}">
+                  <a14:useLocalDpi xmlns:a14="http://schemas.microsoft.com/office/drawing/2010/main" val="0"/>
+                </a:ext>
+              </a:extLst>
+            </a:blip>
+            <a:srcRect/>
+            <a:stretch>
+              <a:fillRect/>
+            </a:stretch>
+          </p:blipFill>
+          <p:spPr bwMode="auto">
+            <a:xfrm>
+              <a:off x="3249312" y="3069328"/>
+              <a:ext cx="199414" cy="199414"/>
+            </a:xfrm>
+            <a:prstGeom prst="rect">
+              <a:avLst/>
+            </a:prstGeom>
+            <a:noFill/>
+            <a:extLst>
+              <a:ext uri="{909E8E84-426E-40DD-AFC4-6F175D3DCCD1}">
+                <a14:hiddenFill xmlns:a14="http://schemas.microsoft.com/office/drawing/2010/main">
+                  <a:solidFill>
+                    <a:srgbClr val="FFFFFF"/>
+                  </a:solidFill>
+                </a14:hiddenFill>
+              </a:ext>
+            </a:extLst>
+          </p:spPr>
+        </p:pic>
+        <p:pic>
+          <p:nvPicPr>
+            <p:cNvPr id="16" name="Picture 4" descr="Grass - Free nature icons">
+              <a:extLst>
+                <a:ext uri="{FF2B5EF4-FFF2-40B4-BE49-F238E27FC236}">
+                  <a16:creationId xmlns:a16="http://schemas.microsoft.com/office/drawing/2014/main" id="{D16B262A-72E8-2C37-3860-243D077AFAC7}"/>
+                </a:ext>
+              </a:extLst>
+            </p:cNvPr>
+            <p:cNvPicPr>
+              <a:picLocks noChangeAspect="1" noChangeArrowheads="1"/>
+            </p:cNvPicPr>
+            <p:nvPr/>
+          </p:nvPicPr>
+          <p:blipFill>
+            <a:blip r:embed="rId5">
+              <a:extLst>
+                <a:ext uri="{28A0092B-C50C-407E-A947-70E740481C1C}">
+                  <a14:useLocalDpi xmlns:a14="http://schemas.microsoft.com/office/drawing/2010/main" val="0"/>
+                </a:ext>
+              </a:extLst>
+            </a:blip>
+            <a:srcRect/>
+            <a:stretch>
+              <a:fillRect/>
+            </a:stretch>
+          </p:blipFill>
+          <p:spPr bwMode="auto">
+            <a:xfrm>
+              <a:off x="3002454" y="3040502"/>
+              <a:ext cx="199414" cy="199414"/>
+            </a:xfrm>
+            <a:prstGeom prst="rect">
+              <a:avLst/>
+            </a:prstGeom>
+            <a:noFill/>
+            <a:extLst>
+              <a:ext uri="{909E8E84-426E-40DD-AFC4-6F175D3DCCD1}">
+                <a14:hiddenFill xmlns:a14="http://schemas.microsoft.com/office/drawing/2010/main">
+                  <a:solidFill>
+                    <a:srgbClr val="FFFFFF"/>
+                  </a:solidFill>
+                </a14:hiddenFill>
+              </a:ext>
+            </a:extLst>
+          </p:spPr>
+        </p:pic>
+        <p:pic>
+          <p:nvPicPr>
+            <p:cNvPr id="17" name="Picture 4" descr="Grass - Free nature icons">
+              <a:extLst>
+                <a:ext uri="{FF2B5EF4-FFF2-40B4-BE49-F238E27FC236}">
+                  <a16:creationId xmlns:a16="http://schemas.microsoft.com/office/drawing/2014/main" id="{644BEF28-54F5-55EC-2476-C3F1A057A320}"/>
+                </a:ext>
+              </a:extLst>
+            </p:cNvPr>
+            <p:cNvPicPr>
+              <a:picLocks noChangeAspect="1" noChangeArrowheads="1"/>
+            </p:cNvPicPr>
+            <p:nvPr/>
+          </p:nvPicPr>
+          <p:blipFill>
+            <a:blip r:embed="rId5">
+              <a:extLst>
+                <a:ext uri="{28A0092B-C50C-407E-A947-70E740481C1C}">
+                  <a14:useLocalDpi xmlns:a14="http://schemas.microsoft.com/office/drawing/2010/main" val="0"/>
+                </a:ext>
+              </a:extLst>
+            </a:blip>
+            <a:srcRect/>
+            <a:stretch>
+              <a:fillRect/>
+            </a:stretch>
+          </p:blipFill>
+          <p:spPr bwMode="auto">
+            <a:xfrm>
+              <a:off x="3349310" y="3042778"/>
+              <a:ext cx="199414" cy="199414"/>
+            </a:xfrm>
+            <a:prstGeom prst="rect">
+              <a:avLst/>
+            </a:prstGeom>
+            <a:noFill/>
+            <a:extLst>
+              <a:ext uri="{909E8E84-426E-40DD-AFC4-6F175D3DCCD1}">
+                <a14:hiddenFill xmlns:a14="http://schemas.microsoft.com/office/drawing/2010/main">
+                  <a:solidFill>
+                    <a:srgbClr val="FFFFFF"/>
+                  </a:solidFill>
+                </a14:hiddenFill>
+              </a:ext>
+            </a:extLst>
+          </p:spPr>
+        </p:pic>
+      </p:grpSp>
+      <p:pic>
+        <p:nvPicPr>
+          <p:cNvPr id="1026" name="Picture 2" descr="Weather - Free nature icons">
+            <a:extLst>
+              <a:ext uri="{FF2B5EF4-FFF2-40B4-BE49-F238E27FC236}">
+                <a16:creationId xmlns:a16="http://schemas.microsoft.com/office/drawing/2014/main" id="{9479AA01-CDD8-B297-E556-C7098DA30CBF}"/>
+              </a:ext>
+            </a:extLst>
+          </p:cNvPr>
+          <p:cNvPicPr>
+            <a:picLocks noChangeAspect="1" noChangeArrowheads="1"/>
+          </p:cNvPicPr>
+          <p:nvPr/>
+        </p:nvPicPr>
+        <p:blipFill>
+          <a:blip r:embed="rId6">
+            <a:extLst>
+              <a:ext uri="{28A0092B-C50C-407E-A947-70E740481C1C}">
+                <a14:useLocalDpi xmlns:a14="http://schemas.microsoft.com/office/drawing/2010/main" val="0"/>
+              </a:ext>
+            </a:extLst>
+          </a:blip>
+          <a:srcRect/>
+          <a:stretch>
+            <a:fillRect/>
+          </a:stretch>
+        </p:blipFill>
+        <p:spPr bwMode="auto">
+          <a:xfrm>
+            <a:off x="7529338" y="2214263"/>
+            <a:ext cx="1428566" cy="1428566"/>
+          </a:xfrm>
+          <a:prstGeom prst="rect">
+            <a:avLst/>
+          </a:prstGeom>
+          <a:noFill/>
+          <a:extLst>
+            <a:ext uri="{909E8E84-426E-40DD-AFC4-6F175D3DCCD1}">
+              <a14:hiddenFill xmlns:a14="http://schemas.microsoft.com/office/drawing/2010/main">
+                <a:solidFill>
+                  <a:srgbClr val="FFFFFF"/>
+                </a:solidFill>
+              </a14:hiddenFill>
+            </a:ext>
+          </a:extLst>
+        </p:spPr>
+      </p:pic>
+      <p:pic>
+        <p:nvPicPr>
+          <p:cNvPr id="1028" name="Picture 4" descr="City - Free architecture and city icons">
+            <a:extLst>
+              <a:ext uri="{FF2B5EF4-FFF2-40B4-BE49-F238E27FC236}">
+                <a16:creationId xmlns:a16="http://schemas.microsoft.com/office/drawing/2014/main" id="{0823C0B7-EDD6-49B8-244B-63037A1A6CD3}"/>
+              </a:ext>
+            </a:extLst>
+          </p:cNvPr>
+          <p:cNvPicPr>
+            <a:picLocks noChangeAspect="1" noChangeArrowheads="1"/>
+          </p:cNvPicPr>
+          <p:nvPr/>
+        </p:nvPicPr>
+        <p:blipFill>
+          <a:blip r:embed="rId7">
+            <a:extLst>
+              <a:ext uri="{28A0092B-C50C-407E-A947-70E740481C1C}">
+                <a14:useLocalDpi xmlns:a14="http://schemas.microsoft.com/office/drawing/2010/main" val="0"/>
+              </a:ext>
+            </a:extLst>
+          </a:blip>
+          <a:srcRect/>
+          <a:stretch>
+            <a:fillRect/>
+          </a:stretch>
+        </p:blipFill>
+        <p:spPr bwMode="auto">
+          <a:xfrm>
+            <a:off x="3126792" y="4680795"/>
+            <a:ext cx="1516857" cy="1516857"/>
+          </a:xfrm>
+          <a:prstGeom prst="rect">
+            <a:avLst/>
+          </a:prstGeom>
+          <a:noFill/>
+          <a:extLst>
+            <a:ext uri="{909E8E84-426E-40DD-AFC4-6F175D3DCCD1}">
+              <a14:hiddenFill xmlns:a14="http://schemas.microsoft.com/office/drawing/2010/main">
+                <a:solidFill>
+                  <a:srgbClr val="FFFFFF"/>
+                </a:solidFill>
+              </a14:hiddenFill>
+            </a:ext>
+          </a:extLst>
+        </p:spPr>
+      </p:pic>
+      <p:pic>
+        <p:nvPicPr>
+          <p:cNvPr id="1030" name="Picture 6" descr="Bobcat Symbol Stock Illustrations – 1,299 Bobcat Symbol Stock  Illustrations, Vectors &amp; Clipart - Dreamstime">
+            <a:extLst>
+              <a:ext uri="{FF2B5EF4-FFF2-40B4-BE49-F238E27FC236}">
+                <a16:creationId xmlns:a16="http://schemas.microsoft.com/office/drawing/2014/main" id="{E2B7548B-D304-75C4-744F-1309C596472E}"/>
+              </a:ext>
+            </a:extLst>
+          </p:cNvPr>
+          <p:cNvPicPr>
+            <a:picLocks noChangeAspect="1" noChangeArrowheads="1"/>
+          </p:cNvPicPr>
+          <p:nvPr/>
+        </p:nvPicPr>
+        <p:blipFill>
+          <a:blip r:embed="rId8">
+            <a:extLst>
+              <a:ext uri="{28A0092B-C50C-407E-A947-70E740481C1C}">
+                <a14:useLocalDpi xmlns:a14="http://schemas.microsoft.com/office/drawing/2010/main" val="0"/>
+              </a:ext>
+            </a:extLst>
+          </a:blip>
+          <a:srcRect/>
+          <a:stretch>
+            <a:fillRect/>
+          </a:stretch>
+        </p:blipFill>
+        <p:spPr bwMode="auto">
+          <a:xfrm>
+            <a:off x="6931830" y="4809617"/>
+            <a:ext cx="1129951" cy="1129951"/>
+          </a:xfrm>
+          <a:prstGeom prst="rect">
+            <a:avLst/>
+          </a:prstGeom>
+          <a:noFill/>
+          <a:extLst>
+            <a:ext uri="{909E8E84-426E-40DD-AFC4-6F175D3DCCD1}">
+              <a14:hiddenFill xmlns:a14="http://schemas.microsoft.com/office/drawing/2010/main">
+                <a:solidFill>
+                  <a:srgbClr val="FFFFFF"/>
+                </a:solidFill>
+              </a14:hiddenFill>
+            </a:ext>
+          </a:extLst>
+        </p:spPr>
+      </p:pic>
+      <p:pic>
+        <p:nvPicPr>
+          <p:cNvPr id="18" name="Picture 4" descr="Grass - Free nature icons">
+            <a:extLst>
+              <a:ext uri="{FF2B5EF4-FFF2-40B4-BE49-F238E27FC236}">
+                <a16:creationId xmlns:a16="http://schemas.microsoft.com/office/drawing/2014/main" id="{10633EBF-5A3C-9972-8B9D-3D647842A74D}"/>
+              </a:ext>
+            </a:extLst>
+          </p:cNvPr>
+          <p:cNvPicPr>
+            <a:picLocks noChangeAspect="1" noChangeArrowheads="1"/>
+          </p:cNvPicPr>
+          <p:nvPr/>
+        </p:nvPicPr>
+        <p:blipFill>
+          <a:blip r:embed="rId5">
+            <a:extLst>
+              <a:ext uri="{28A0092B-C50C-407E-A947-70E740481C1C}">
+                <a14:useLocalDpi xmlns:a14="http://schemas.microsoft.com/office/drawing/2010/main" val="0"/>
+              </a:ext>
+            </a:extLst>
+          </a:blip>
+          <a:srcRect/>
+          <a:stretch>
+            <a:fillRect/>
+          </a:stretch>
+        </p:blipFill>
+        <p:spPr bwMode="auto">
+          <a:xfrm>
+            <a:off x="5188366" y="1285492"/>
+            <a:ext cx="1073538" cy="1316059"/>
+          </a:xfrm>
+          <a:prstGeom prst="rect">
+            <a:avLst/>
+          </a:prstGeom>
+          <a:noFill/>
+          <a:extLst>
+            <a:ext uri="{909E8E84-426E-40DD-AFC4-6F175D3DCCD1}">
+              <a14:hiddenFill xmlns:a14="http://schemas.microsoft.com/office/drawing/2010/main">
+                <a:solidFill>
+                  <a:srgbClr val="FFFFFF"/>
+                </a:solidFill>
+              </a14:hiddenFill>
+            </a:ext>
+          </a:extLst>
+        </p:spPr>
+      </p:pic>
+      <p:sp>
+        <p:nvSpPr>
+          <p:cNvPr id="20" name="Arrow: Right 19">
+            <a:extLst>
+              <a:ext uri="{FF2B5EF4-FFF2-40B4-BE49-F238E27FC236}">
+                <a16:creationId xmlns:a16="http://schemas.microsoft.com/office/drawing/2014/main" id="{71144CC6-7549-C997-C121-43FB559FF30B}"/>
+              </a:ext>
+            </a:extLst>
+          </p:cNvPr>
+          <p:cNvSpPr/>
+          <p:nvPr/>
+        </p:nvSpPr>
+        <p:spPr>
+          <a:xfrm rot="1920130">
+            <a:off x="3985715" y="3166694"/>
+            <a:ext cx="932085" cy="318979"/>
+          </a:xfrm>
+          <a:prstGeom prst="rightArrow">
+            <a:avLst/>
+          </a:prstGeom>
+          <a:solidFill>
+            <a:srgbClr val="7030A0"/>
+          </a:solidFill>
+        </p:spPr>
+        <p:style>
+          <a:lnRef idx="2">
+            <a:schemeClr val="accent1">
+              <a:shade val="50000"/>
+            </a:schemeClr>
+          </a:lnRef>
+          <a:fillRef idx="1">
+            <a:schemeClr val="accent1"/>
+          </a:fillRef>
+          <a:effectRef idx="0">
+            <a:schemeClr val="accent1"/>
+          </a:effectRef>
+          <a:fontRef idx="minor">
+            <a:schemeClr val="lt1"/>
+          </a:fontRef>
+        </p:style>
+        <p:txBody>
+          <a:bodyPr rtlCol="0" anchor="ctr"/>
+          <a:lstStyle/>
+          <a:p>
+            <a:pPr algn="ctr"/>
+            <a:endParaRPr lang="en-US"/>
+          </a:p>
+        </p:txBody>
+      </p:sp>
+      <p:sp>
+        <p:nvSpPr>
+          <p:cNvPr id="21" name="Arrow: Right 20">
+            <a:extLst>
+              <a:ext uri="{FF2B5EF4-FFF2-40B4-BE49-F238E27FC236}">
+                <a16:creationId xmlns:a16="http://schemas.microsoft.com/office/drawing/2014/main" id="{485B359A-F4FB-E700-7565-C8AA4510D94B}"/>
+              </a:ext>
+            </a:extLst>
+          </p:cNvPr>
+          <p:cNvSpPr/>
+          <p:nvPr/>
+        </p:nvSpPr>
+        <p:spPr>
+          <a:xfrm rot="5400000">
+            <a:off x="5277296" y="2823661"/>
+            <a:ext cx="932085" cy="318979"/>
+          </a:xfrm>
+          <a:prstGeom prst="rightArrow">
+            <a:avLst/>
+          </a:prstGeom>
+          <a:solidFill>
+            <a:srgbClr val="7030A0"/>
+          </a:solidFill>
+        </p:spPr>
+        <p:style>
+          <a:lnRef idx="2">
+            <a:schemeClr val="accent1">
+              <a:shade val="50000"/>
+            </a:schemeClr>
+          </a:lnRef>
+          <a:fillRef idx="1">
+            <a:schemeClr val="accent1"/>
+          </a:fillRef>
+          <a:effectRef idx="0">
+            <a:schemeClr val="accent1"/>
+          </a:effectRef>
+          <a:fontRef idx="minor">
+            <a:schemeClr val="lt1"/>
+          </a:fontRef>
+        </p:style>
+        <p:txBody>
+          <a:bodyPr rtlCol="0" anchor="ctr"/>
+          <a:lstStyle/>
+          <a:p>
+            <a:pPr algn="ctr"/>
+            <a:endParaRPr lang="en-US"/>
+          </a:p>
+        </p:txBody>
+      </p:sp>
+      <p:sp>
+        <p:nvSpPr>
+          <p:cNvPr id="22" name="Arrow: Right 21">
+            <a:extLst>
+              <a:ext uri="{FF2B5EF4-FFF2-40B4-BE49-F238E27FC236}">
+                <a16:creationId xmlns:a16="http://schemas.microsoft.com/office/drawing/2014/main" id="{3D59F04E-7782-3C36-BDAB-764FC3D5362D}"/>
+              </a:ext>
+            </a:extLst>
+          </p:cNvPr>
+          <p:cNvSpPr/>
+          <p:nvPr/>
+        </p:nvSpPr>
+        <p:spPr>
+          <a:xfrm rot="18846889">
+            <a:off x="4479604" y="4647095"/>
+            <a:ext cx="932085" cy="318979"/>
+          </a:xfrm>
+          <a:prstGeom prst="rightArrow">
+            <a:avLst/>
+          </a:prstGeom>
+          <a:solidFill>
+            <a:srgbClr val="7030A0"/>
+          </a:solidFill>
+        </p:spPr>
+        <p:style>
+          <a:lnRef idx="2">
+            <a:schemeClr val="accent1">
+              <a:shade val="50000"/>
+            </a:schemeClr>
+          </a:lnRef>
+          <a:fillRef idx="1">
+            <a:schemeClr val="accent1"/>
+          </a:fillRef>
+          <a:effectRef idx="0">
+            <a:schemeClr val="accent1"/>
+          </a:effectRef>
+          <a:fontRef idx="minor">
+            <a:schemeClr val="lt1"/>
+          </a:fontRef>
+        </p:style>
+        <p:txBody>
+          <a:bodyPr rtlCol="0" anchor="ctr"/>
+          <a:lstStyle/>
+          <a:p>
+            <a:pPr algn="ctr"/>
+            <a:endParaRPr lang="en-US"/>
+          </a:p>
+        </p:txBody>
+      </p:sp>
+      <p:sp>
+        <p:nvSpPr>
+          <p:cNvPr id="23" name="Arrow: Right 22">
+            <a:extLst>
+              <a:ext uri="{FF2B5EF4-FFF2-40B4-BE49-F238E27FC236}">
+                <a16:creationId xmlns:a16="http://schemas.microsoft.com/office/drawing/2014/main" id="{35BA1CCE-ADCA-C13A-F5B3-8C6674CDB1FB}"/>
+              </a:ext>
+            </a:extLst>
+          </p:cNvPr>
+          <p:cNvSpPr/>
+          <p:nvPr/>
+        </p:nvSpPr>
+        <p:spPr>
+          <a:xfrm rot="13157124">
+            <a:off x="6200495" y="4647094"/>
+            <a:ext cx="808924" cy="318979"/>
+          </a:xfrm>
+          <a:prstGeom prst="rightArrow">
+            <a:avLst/>
+          </a:prstGeom>
+          <a:solidFill>
+            <a:srgbClr val="7030A0"/>
+          </a:solidFill>
+        </p:spPr>
+        <p:style>
+          <a:lnRef idx="2">
+            <a:schemeClr val="accent1">
+              <a:shade val="50000"/>
+            </a:schemeClr>
+          </a:lnRef>
+          <a:fillRef idx="1">
+            <a:schemeClr val="accent1"/>
+          </a:fillRef>
+          <a:effectRef idx="0">
+            <a:schemeClr val="accent1"/>
+          </a:effectRef>
+          <a:fontRef idx="minor">
+            <a:schemeClr val="lt1"/>
+          </a:fontRef>
+        </p:style>
+        <p:txBody>
+          <a:bodyPr rtlCol="0" anchor="ctr"/>
+          <a:lstStyle/>
+          <a:p>
+            <a:pPr algn="ctr"/>
+            <a:endParaRPr lang="en-US"/>
+          </a:p>
+        </p:txBody>
+      </p:sp>
+      <p:sp>
+        <p:nvSpPr>
+          <p:cNvPr id="24" name="Arrow: Right 23">
+            <a:extLst>
+              <a:ext uri="{FF2B5EF4-FFF2-40B4-BE49-F238E27FC236}">
+                <a16:creationId xmlns:a16="http://schemas.microsoft.com/office/drawing/2014/main" id="{528F6F00-5836-9204-85F4-F99EA9EBACC9}"/>
+              </a:ext>
+            </a:extLst>
+          </p:cNvPr>
+          <p:cNvSpPr/>
+          <p:nvPr/>
+        </p:nvSpPr>
+        <p:spPr>
+          <a:xfrm rot="9356357">
+            <a:off x="6657999" y="3355514"/>
+            <a:ext cx="808924" cy="318979"/>
+          </a:xfrm>
+          <a:prstGeom prst="rightArrow">
+            <a:avLst/>
+          </a:prstGeom>
+          <a:solidFill>
+            <a:srgbClr val="7030A0"/>
+          </a:solidFill>
+        </p:spPr>
+        <p:style>
+          <a:lnRef idx="2">
+            <a:schemeClr val="accent1">
+              <a:shade val="50000"/>
+            </a:schemeClr>
+          </a:lnRef>
+          <a:fillRef idx="1">
+            <a:schemeClr val="accent1"/>
+          </a:fillRef>
+          <a:effectRef idx="0">
+            <a:schemeClr val="accent1"/>
+          </a:effectRef>
+          <a:fontRef idx="minor">
+            <a:schemeClr val="lt1"/>
+          </a:fontRef>
+        </p:style>
+        <p:txBody>
+          <a:bodyPr rtlCol="0" anchor="ctr"/>
+          <a:lstStyle/>
+          <a:p>
+            <a:pPr algn="ctr"/>
+            <a:endParaRPr lang="en-US"/>
+          </a:p>
+        </p:txBody>
+      </p:sp>
+    </p:spTree>
+    <p:extLst>
+      <p:ext uri="{BB962C8B-B14F-4D97-AF65-F5344CB8AC3E}">
+        <p14:creationId xmlns:p14="http://schemas.microsoft.com/office/powerpoint/2010/main" val="1360744752"/>
       </p:ext>
     </p:extLst>
   </p:cSld>
